--- a/ゲーム科3年/00_前期/オンラインゲームプログラミングⅠ/09_ログイン.pptx
+++ b/ゲーム科3年/00_前期/オンラインゲームプログラミングⅠ/09_ログイン.pptx
@@ -5,20 +5,21 @@
     <p:sldMasterId id="2147483648" r:id="rId1"/>
   </p:sldMasterIdLst>
   <p:sldIdLst>
-    <p:sldId id="256" r:id="rId2"/>
-    <p:sldId id="257" r:id="rId3"/>
-    <p:sldId id="258" r:id="rId4"/>
-    <p:sldId id="259" r:id="rId5"/>
+    <p:sldId id="257" r:id="rId2"/>
+    <p:sldId id="258" r:id="rId3"/>
+    <p:sldId id="259" r:id="rId4"/>
+    <p:sldId id="270" r:id="rId5"/>
     <p:sldId id="260" r:id="rId6"/>
     <p:sldId id="261" r:id="rId7"/>
     <p:sldId id="262" r:id="rId8"/>
-    <p:sldId id="264" r:id="rId9"/>
-    <p:sldId id="263" r:id="rId10"/>
+    <p:sldId id="263" r:id="rId9"/>
+    <p:sldId id="264" r:id="rId10"/>
     <p:sldId id="265" r:id="rId11"/>
     <p:sldId id="266" r:id="rId12"/>
-    <p:sldId id="267" r:id="rId13"/>
-    <p:sldId id="268" r:id="rId14"/>
-    <p:sldId id="269" r:id="rId15"/>
+    <p:sldId id="271" r:id="rId13"/>
+    <p:sldId id="267" r:id="rId14"/>
+    <p:sldId id="268" r:id="rId15"/>
+    <p:sldId id="269" r:id="rId16"/>
   </p:sldIdLst>
   <p:sldSz cx="12192000" cy="6858000"/>
   <p:notesSz cx="6858000" cy="9144000"/>
@@ -272,7 +273,7 @@
           <a:p>
             <a:fld id="{E9CC885B-4903-4D54-9A93-00025F12DED9}" type="datetimeFigureOut">
               <a:rPr kumimoji="1" lang="ja-JP" altLang="en-US" smtClean="0"/>
-              <a:t>2025/11/6</a:t>
+              <a:t>2026/1/16</a:t>
             </a:fld>
             <a:endParaRPr kumimoji="1" lang="ja-JP" altLang="en-US"/>
           </a:p>
@@ -502,7 +503,7 @@
           <a:p>
             <a:fld id="{E9CC885B-4903-4D54-9A93-00025F12DED9}" type="datetimeFigureOut">
               <a:rPr kumimoji="1" lang="ja-JP" altLang="en-US" smtClean="0"/>
-              <a:t>2025/11/6</a:t>
+              <a:t>2026/1/16</a:t>
             </a:fld>
             <a:endParaRPr kumimoji="1" lang="ja-JP" altLang="en-US"/>
           </a:p>
@@ -742,7 +743,7 @@
           <a:p>
             <a:fld id="{E9CC885B-4903-4D54-9A93-00025F12DED9}" type="datetimeFigureOut">
               <a:rPr kumimoji="1" lang="ja-JP" altLang="en-US" smtClean="0"/>
-              <a:t>2025/11/6</a:t>
+              <a:t>2026/1/16</a:t>
             </a:fld>
             <a:endParaRPr kumimoji="1" lang="ja-JP" altLang="en-US"/>
           </a:p>
@@ -972,7 +973,7 @@
           <a:p>
             <a:fld id="{E9CC885B-4903-4D54-9A93-00025F12DED9}" type="datetimeFigureOut">
               <a:rPr kumimoji="1" lang="ja-JP" altLang="en-US" smtClean="0"/>
-              <a:t>2025/11/6</a:t>
+              <a:t>2026/1/16</a:t>
             </a:fld>
             <a:endParaRPr kumimoji="1" lang="ja-JP" altLang="en-US"/>
           </a:p>
@@ -1247,7 +1248,7 @@
           <a:p>
             <a:fld id="{E9CC885B-4903-4D54-9A93-00025F12DED9}" type="datetimeFigureOut">
               <a:rPr kumimoji="1" lang="ja-JP" altLang="en-US" smtClean="0"/>
-              <a:t>2025/11/6</a:t>
+              <a:t>2026/1/16</a:t>
             </a:fld>
             <a:endParaRPr kumimoji="1" lang="ja-JP" altLang="en-US"/>
           </a:p>
@@ -1576,7 +1577,7 @@
           <a:p>
             <a:fld id="{E9CC885B-4903-4D54-9A93-00025F12DED9}" type="datetimeFigureOut">
               <a:rPr kumimoji="1" lang="ja-JP" altLang="en-US" smtClean="0"/>
-              <a:t>2025/11/6</a:t>
+              <a:t>2026/1/16</a:t>
             </a:fld>
             <a:endParaRPr kumimoji="1" lang="ja-JP" altLang="en-US"/>
           </a:p>
@@ -2052,7 +2053,7 @@
           <a:p>
             <a:fld id="{E9CC885B-4903-4D54-9A93-00025F12DED9}" type="datetimeFigureOut">
               <a:rPr kumimoji="1" lang="ja-JP" altLang="en-US" smtClean="0"/>
-              <a:t>2025/11/6</a:t>
+              <a:t>2026/1/16</a:t>
             </a:fld>
             <a:endParaRPr kumimoji="1" lang="ja-JP" altLang="en-US"/>
           </a:p>
@@ -2193,7 +2194,7 @@
           <a:p>
             <a:fld id="{E9CC885B-4903-4D54-9A93-00025F12DED9}" type="datetimeFigureOut">
               <a:rPr kumimoji="1" lang="ja-JP" altLang="en-US" smtClean="0"/>
-              <a:t>2025/11/6</a:t>
+              <a:t>2026/1/16</a:t>
             </a:fld>
             <a:endParaRPr kumimoji="1" lang="ja-JP" altLang="en-US"/>
           </a:p>
@@ -2306,7 +2307,7 @@
           <a:p>
             <a:fld id="{E9CC885B-4903-4D54-9A93-00025F12DED9}" type="datetimeFigureOut">
               <a:rPr kumimoji="1" lang="ja-JP" altLang="en-US" smtClean="0"/>
-              <a:t>2025/11/6</a:t>
+              <a:t>2026/1/16</a:t>
             </a:fld>
             <a:endParaRPr kumimoji="1" lang="ja-JP" altLang="en-US"/>
           </a:p>
@@ -2649,7 +2650,7 @@
           <a:p>
             <a:fld id="{E9CC885B-4903-4D54-9A93-00025F12DED9}" type="datetimeFigureOut">
               <a:rPr kumimoji="1" lang="ja-JP" altLang="en-US" smtClean="0"/>
-              <a:t>2025/11/6</a:t>
+              <a:t>2026/1/16</a:t>
             </a:fld>
             <a:endParaRPr kumimoji="1" lang="ja-JP" altLang="en-US"/>
           </a:p>
@@ -2937,7 +2938,7 @@
           <a:p>
             <a:fld id="{E9CC885B-4903-4D54-9A93-00025F12DED9}" type="datetimeFigureOut">
               <a:rPr kumimoji="1" lang="ja-JP" altLang="en-US" smtClean="0"/>
-              <a:t>2025/11/6</a:t>
+              <a:t>2026/1/16</a:t>
             </a:fld>
             <a:endParaRPr kumimoji="1" lang="ja-JP" altLang="en-US"/>
           </a:p>
@@ -3210,7 +3211,7 @@
           <a:p>
             <a:fld id="{E9CC885B-4903-4D54-9A93-00025F12DED9}" type="datetimeFigureOut">
               <a:rPr kumimoji="1" lang="ja-JP" altLang="en-US" smtClean="0"/>
-              <a:t>2025/11/6</a:t>
+              <a:t>2026/1/16</a:t>
             </a:fld>
             <a:endParaRPr kumimoji="1" lang="ja-JP" altLang="en-US"/>
           </a:p>
@@ -3642,7 +3643,7 @@
         <p:spPr>
           <a:xfrm>
             <a:off x="567542" y="491954"/>
-            <a:ext cx="4346062" cy="584775"/>
+            <a:ext cx="1826141" cy="584775"/>
           </a:xfrm>
           <a:prstGeom prst="rect">
             <a:avLst/>
@@ -3656,12 +3657,8 @@
           <a:lstStyle/>
           <a:p>
             <a:r>
-              <a:rPr kumimoji="1" lang="en-US" altLang="ja-JP" sz="3200" b="1" u="sng" dirty="0"/>
-              <a:t>Network</a:t>
-            </a:r>
-            <a:r>
               <a:rPr kumimoji="1" lang="ja-JP" altLang="en-US" sz="3200" b="1" u="sng" dirty="0"/>
-              <a:t>オブジェクト</a:t>
+              <a:t>ログイン</a:t>
             </a:r>
           </a:p>
         </p:txBody>
@@ -3681,7 +3678,7 @@
         <p:spPr>
           <a:xfrm>
             <a:off x="567542" y="1216429"/>
-            <a:ext cx="7263527" cy="2308324"/>
+            <a:ext cx="9725739" cy="830997"/>
           </a:xfrm>
           <a:prstGeom prst="rect">
             <a:avLst/>
@@ -3696,63 +3693,441 @@
           <a:p>
             <a:r>
               <a:rPr kumimoji="1" lang="ja-JP" altLang="en-US" sz="2400" dirty="0"/>
-              <a:t>オンライン用に必要なオブジェクトを作成します。</a:t>
-            </a:r>
-            <a:endParaRPr kumimoji="1" lang="en-US" altLang="ja-JP" sz="2400" dirty="0"/>
-          </a:p>
-          <a:p>
-            <a:r>
-              <a:rPr lang="ja-JP" altLang="en-US" sz="2400" dirty="0"/>
-              <a:t>今回は以下の２つを作成します。</a:t>
-            </a:r>
-            <a:endParaRPr lang="en-US" altLang="ja-JP" sz="2400" dirty="0"/>
-          </a:p>
-          <a:p>
-            <a:endParaRPr kumimoji="1" lang="en-US" altLang="ja-JP" sz="2400" dirty="0"/>
-          </a:p>
-          <a:p>
-            <a:r>
-              <a:rPr lang="ja-JP" altLang="en-US" sz="2400" b="1" dirty="0">
+              <a:t>オンラインゲームを開始する合図となる</a:t>
+            </a:r>
+            <a:r>
+              <a:rPr kumimoji="1" lang="ja-JP" altLang="en-US" sz="2400" b="1" dirty="0">
                 <a:solidFill>
                   <a:srgbClr val="FF0000"/>
                 </a:solidFill>
               </a:rPr>
-              <a:t>■オンライン用オブジェクト</a:t>
-            </a:r>
-            <a:endParaRPr lang="en-US" altLang="ja-JP" sz="2400" b="1" dirty="0">
+              <a:t>ログイン処理</a:t>
+            </a:r>
+            <a:r>
+              <a:rPr kumimoji="1" lang="ja-JP" altLang="en-US" sz="2400" dirty="0"/>
+              <a:t>を実装します。</a:t>
+            </a:r>
+            <a:endParaRPr kumimoji="1" lang="en-US" altLang="ja-JP" sz="2400" dirty="0"/>
+          </a:p>
+          <a:p>
+            <a:r>
+              <a:rPr lang="ja-JP" altLang="en-US" sz="2400" dirty="0"/>
+              <a:t>大まかな流れは以下の通りです。</a:t>
+            </a:r>
+            <a:endParaRPr lang="en-US" altLang="ja-JP" sz="2400" dirty="0"/>
+          </a:p>
+        </p:txBody>
+      </p:sp>
+      <p:sp>
+        <p:nvSpPr>
+          <p:cNvPr id="7" name="テキスト ボックス 6">
+            <a:extLst>
+              <a:ext uri="{FF2B5EF4-FFF2-40B4-BE49-F238E27FC236}">
+                <a16:creationId xmlns:a16="http://schemas.microsoft.com/office/drawing/2014/main" id="{3BC32E2B-08FB-4C85-9154-A673C707A66E}"/>
+              </a:ext>
+            </a:extLst>
+          </p:cNvPr>
+          <p:cNvSpPr txBox="1"/>
+          <p:nvPr/>
+        </p:nvSpPr>
+        <p:spPr>
+          <a:xfrm>
+            <a:off x="1321075" y="2187126"/>
+            <a:ext cx="1415772" cy="338554"/>
+          </a:xfrm>
+          <a:prstGeom prst="rect">
+            <a:avLst/>
+          </a:prstGeom>
+          <a:noFill/>
+        </p:spPr>
+        <p:txBody>
+          <a:bodyPr wrap="none" rtlCol="0">
+            <a:spAutoFit/>
+          </a:bodyPr>
+          <a:lstStyle/>
+          <a:p>
+            <a:r>
+              <a:rPr kumimoji="1" lang="ja-JP" altLang="en-US" sz="1600" b="1" dirty="0">
+                <a:solidFill>
+                  <a:srgbClr val="0070C0"/>
+                </a:solidFill>
+              </a:rPr>
+              <a:t>クライアント</a:t>
+            </a:r>
+            <a:endParaRPr lang="en-US" altLang="ja-JP" sz="1600" b="1" dirty="0">
               <a:solidFill>
-                <a:srgbClr val="FF0000"/>
+                <a:srgbClr val="0070C0"/>
               </a:solidFill>
             </a:endParaRPr>
           </a:p>
-          <a:p>
-            <a:r>
-              <a:rPr kumimoji="1" lang="ja-JP" altLang="en-US" sz="2400" dirty="0"/>
-              <a:t>・</a:t>
-            </a:r>
-            <a:r>
-              <a:rPr kumimoji="1" lang="en-US" altLang="ja-JP" sz="2400" dirty="0" err="1"/>
-              <a:t>NetworkPlayer</a:t>
-            </a:r>
-            <a:endParaRPr kumimoji="1" lang="en-US" altLang="ja-JP" sz="2400" dirty="0"/>
-          </a:p>
-          <a:p>
-            <a:r>
-              <a:rPr lang="ja-JP" altLang="en-US" sz="2400" dirty="0"/>
-              <a:t>・</a:t>
-            </a:r>
-            <a:r>
-              <a:rPr lang="en-US" altLang="ja-JP" sz="2400" dirty="0" err="1"/>
-              <a:t>NetworkPlayScene</a:t>
-            </a:r>
-            <a:endParaRPr kumimoji="1" lang="en-US" altLang="ja-JP" sz="2400" dirty="0"/>
+        </p:txBody>
+      </p:sp>
+      <p:sp>
+        <p:nvSpPr>
+          <p:cNvPr id="5" name="正方形/長方形 4">
+            <a:extLst>
+              <a:ext uri="{FF2B5EF4-FFF2-40B4-BE49-F238E27FC236}">
+                <a16:creationId xmlns:a16="http://schemas.microsoft.com/office/drawing/2014/main" id="{669CE799-BA1F-420A-A338-12FBE6C15727}"/>
+              </a:ext>
+            </a:extLst>
+          </p:cNvPr>
+          <p:cNvSpPr/>
+          <p:nvPr/>
+        </p:nvSpPr>
+        <p:spPr>
+          <a:xfrm>
+            <a:off x="1029894" y="2665380"/>
+            <a:ext cx="1998133" cy="2346887"/>
+          </a:xfrm>
+          <a:prstGeom prst="rect">
+            <a:avLst/>
+          </a:prstGeom>
+        </p:spPr>
+        <p:style>
+          <a:lnRef idx="2">
+            <a:schemeClr val="accent1">
+              <a:shade val="50000"/>
+            </a:schemeClr>
+          </a:lnRef>
+          <a:fillRef idx="1">
+            <a:schemeClr val="accent1"/>
+          </a:fillRef>
+          <a:effectRef idx="0">
+            <a:schemeClr val="accent1"/>
+          </a:effectRef>
+          <a:fontRef idx="minor">
+            <a:schemeClr val="lt1"/>
+          </a:fontRef>
+        </p:style>
+        <p:txBody>
+          <a:bodyPr rtlCol="0" anchor="ctr"/>
+          <a:lstStyle/>
+          <a:p>
+            <a:pPr algn="ctr"/>
+            <a:endParaRPr kumimoji="1" lang="ja-JP" altLang="en-US"/>
+          </a:p>
+        </p:txBody>
+      </p:sp>
+      <p:sp>
+        <p:nvSpPr>
+          <p:cNvPr id="9" name="正方形/長方形 8">
+            <a:extLst>
+              <a:ext uri="{FF2B5EF4-FFF2-40B4-BE49-F238E27FC236}">
+                <a16:creationId xmlns:a16="http://schemas.microsoft.com/office/drawing/2014/main" id="{E8D068BB-7649-4787-A9A5-5BFEC622B502}"/>
+              </a:ext>
+            </a:extLst>
+          </p:cNvPr>
+          <p:cNvSpPr/>
+          <p:nvPr/>
+        </p:nvSpPr>
+        <p:spPr>
+          <a:xfrm>
+            <a:off x="7092027" y="2665380"/>
+            <a:ext cx="1998133" cy="2346887"/>
+          </a:xfrm>
+          <a:prstGeom prst="rect">
+            <a:avLst/>
+          </a:prstGeom>
+        </p:spPr>
+        <p:style>
+          <a:lnRef idx="2">
+            <a:schemeClr val="accent6">
+              <a:shade val="50000"/>
+            </a:schemeClr>
+          </a:lnRef>
+          <a:fillRef idx="1">
+            <a:schemeClr val="accent6"/>
+          </a:fillRef>
+          <a:effectRef idx="0">
+            <a:schemeClr val="accent6"/>
+          </a:effectRef>
+          <a:fontRef idx="minor">
+            <a:schemeClr val="lt1"/>
+          </a:fontRef>
+        </p:style>
+        <p:txBody>
+          <a:bodyPr rtlCol="0" anchor="ctr"/>
+          <a:lstStyle/>
+          <a:p>
+            <a:pPr algn="ctr"/>
+            <a:endParaRPr kumimoji="1" lang="ja-JP" altLang="en-US"/>
+          </a:p>
+        </p:txBody>
+      </p:sp>
+      <p:sp>
+        <p:nvSpPr>
+          <p:cNvPr id="10" name="テキスト ボックス 9">
+            <a:extLst>
+              <a:ext uri="{FF2B5EF4-FFF2-40B4-BE49-F238E27FC236}">
+                <a16:creationId xmlns:a16="http://schemas.microsoft.com/office/drawing/2014/main" id="{F466A805-61B0-489C-97CB-56130C0754D1}"/>
+              </a:ext>
+            </a:extLst>
+          </p:cNvPr>
+          <p:cNvSpPr txBox="1"/>
+          <p:nvPr/>
+        </p:nvSpPr>
+        <p:spPr>
+          <a:xfrm>
+            <a:off x="7588391" y="2187126"/>
+            <a:ext cx="1005403" cy="338554"/>
+          </a:xfrm>
+          <a:prstGeom prst="rect">
+            <a:avLst/>
+          </a:prstGeom>
+          <a:noFill/>
+        </p:spPr>
+        <p:txBody>
+          <a:bodyPr wrap="none" rtlCol="0">
+            <a:spAutoFit/>
+          </a:bodyPr>
+          <a:lstStyle/>
+          <a:p>
+            <a:r>
+              <a:rPr kumimoji="1" lang="ja-JP" altLang="en-US" sz="1600" b="1" dirty="0">
+                <a:solidFill>
+                  <a:srgbClr val="00B050"/>
+                </a:solidFill>
+              </a:rPr>
+              <a:t>サーバー</a:t>
+            </a:r>
+            <a:endParaRPr lang="en-US" altLang="ja-JP" sz="1600" b="1" dirty="0">
+              <a:solidFill>
+                <a:srgbClr val="00B050"/>
+              </a:solidFill>
+            </a:endParaRPr>
+          </a:p>
+        </p:txBody>
+      </p:sp>
+      <p:sp>
+        <p:nvSpPr>
+          <p:cNvPr id="11" name="正方形/長方形 10">
+            <a:extLst>
+              <a:ext uri="{FF2B5EF4-FFF2-40B4-BE49-F238E27FC236}">
+                <a16:creationId xmlns:a16="http://schemas.microsoft.com/office/drawing/2014/main" id="{8EDB46D4-8A6C-4BB5-8134-ACEBA23380BB}"/>
+              </a:ext>
+            </a:extLst>
+          </p:cNvPr>
+          <p:cNvSpPr/>
+          <p:nvPr/>
+        </p:nvSpPr>
+        <p:spPr>
+          <a:xfrm>
+            <a:off x="7501466" y="2944081"/>
+            <a:ext cx="1422401" cy="1721052"/>
+          </a:xfrm>
+          <a:prstGeom prst="rect">
+            <a:avLst/>
+          </a:prstGeom>
+        </p:spPr>
+        <p:style>
+          <a:lnRef idx="2">
+            <a:schemeClr val="accent2"/>
+          </a:lnRef>
+          <a:fillRef idx="1">
+            <a:schemeClr val="lt1"/>
+          </a:fillRef>
+          <a:effectRef idx="0">
+            <a:schemeClr val="accent2"/>
+          </a:effectRef>
+          <a:fontRef idx="minor">
+            <a:schemeClr val="dk1"/>
+          </a:fontRef>
+        </p:style>
+        <p:txBody>
+          <a:bodyPr rtlCol="0" anchor="ctr"/>
+          <a:lstStyle/>
+          <a:p>
+            <a:pPr algn="ctr"/>
+            <a:r>
+              <a:rPr kumimoji="1" lang="ja-JP" altLang="en-US" sz="1200" b="1" dirty="0"/>
+              <a:t>クライアント登録</a:t>
+            </a:r>
+            <a:endParaRPr kumimoji="1" lang="en-US" altLang="ja-JP" sz="1200" b="1" dirty="0"/>
+          </a:p>
+          <a:p>
+            <a:pPr algn="ctr"/>
+            <a:r>
+              <a:rPr kumimoji="1" lang="en-US" altLang="ja-JP" sz="1200" b="1" dirty="0"/>
+              <a:t>ID</a:t>
+            </a:r>
+            <a:r>
+              <a:rPr kumimoji="1" lang="ja-JP" altLang="en-US" sz="1200" b="1" dirty="0"/>
+              <a:t>生成</a:t>
+            </a:r>
+          </a:p>
+        </p:txBody>
+      </p:sp>
+      <p:sp>
+        <p:nvSpPr>
+          <p:cNvPr id="12" name="矢印: 右 11">
+            <a:extLst>
+              <a:ext uri="{FF2B5EF4-FFF2-40B4-BE49-F238E27FC236}">
+                <a16:creationId xmlns:a16="http://schemas.microsoft.com/office/drawing/2014/main" id="{96BB847F-CC54-4269-9516-EDD8B239294F}"/>
+              </a:ext>
+            </a:extLst>
+          </p:cNvPr>
+          <p:cNvSpPr/>
+          <p:nvPr/>
+        </p:nvSpPr>
+        <p:spPr>
+          <a:xfrm>
+            <a:off x="3028026" y="2971800"/>
+            <a:ext cx="4473439" cy="457200"/>
+          </a:xfrm>
+          <a:prstGeom prst="rightArrow">
+            <a:avLst/>
+          </a:prstGeom>
+        </p:spPr>
+        <p:style>
+          <a:lnRef idx="2">
+            <a:schemeClr val="accent5">
+              <a:shade val="50000"/>
+            </a:schemeClr>
+          </a:lnRef>
+          <a:fillRef idx="1">
+            <a:schemeClr val="accent5"/>
+          </a:fillRef>
+          <a:effectRef idx="0">
+            <a:schemeClr val="accent5"/>
+          </a:effectRef>
+          <a:fontRef idx="minor">
+            <a:schemeClr val="lt1"/>
+          </a:fontRef>
+        </p:style>
+        <p:txBody>
+          <a:bodyPr rtlCol="0" anchor="ctr"/>
+          <a:lstStyle/>
+          <a:p>
+            <a:pPr algn="ctr"/>
+            <a:r>
+              <a:rPr kumimoji="1" lang="ja-JP" altLang="en-US" b="1" dirty="0"/>
+              <a:t>接続</a:t>
+            </a:r>
+          </a:p>
+        </p:txBody>
+      </p:sp>
+      <p:sp>
+        <p:nvSpPr>
+          <p:cNvPr id="13" name="矢印: 左 12">
+            <a:extLst>
+              <a:ext uri="{FF2B5EF4-FFF2-40B4-BE49-F238E27FC236}">
+                <a16:creationId xmlns:a16="http://schemas.microsoft.com/office/drawing/2014/main" id="{4B1B2CF8-0C1D-4512-9BE8-36965416806C}"/>
+              </a:ext>
+            </a:extLst>
+          </p:cNvPr>
+          <p:cNvSpPr/>
+          <p:nvPr/>
+        </p:nvSpPr>
+        <p:spPr>
+          <a:xfrm>
+            <a:off x="2575124" y="3881156"/>
+            <a:ext cx="4926342" cy="524933"/>
+          </a:xfrm>
+          <a:prstGeom prst="leftArrow">
+            <a:avLst/>
+          </a:prstGeom>
+          <a:solidFill>
+            <a:schemeClr val="accent6">
+              <a:lumMod val="75000"/>
+            </a:schemeClr>
+          </a:solidFill>
+        </p:spPr>
+        <p:style>
+          <a:lnRef idx="2">
+            <a:schemeClr val="accent6">
+              <a:shade val="50000"/>
+            </a:schemeClr>
+          </a:lnRef>
+          <a:fillRef idx="1">
+            <a:schemeClr val="accent6"/>
+          </a:fillRef>
+          <a:effectRef idx="0">
+            <a:schemeClr val="accent6"/>
+          </a:effectRef>
+          <a:fontRef idx="minor">
+            <a:schemeClr val="lt1"/>
+          </a:fontRef>
+        </p:style>
+        <p:txBody>
+          <a:bodyPr rtlCol="0" anchor="ctr"/>
+          <a:lstStyle/>
+          <a:p>
+            <a:pPr algn="ctr"/>
+            <a:r>
+              <a:rPr kumimoji="1" lang="en-US" altLang="ja-JP" b="1" dirty="0"/>
+              <a:t>ID</a:t>
+            </a:r>
+            <a:r>
+              <a:rPr kumimoji="1" lang="ja-JP" altLang="en-US" b="1" dirty="0"/>
+              <a:t>配布</a:t>
+            </a:r>
+          </a:p>
+        </p:txBody>
+      </p:sp>
+      <p:sp>
+        <p:nvSpPr>
+          <p:cNvPr id="14" name="正方形/長方形 13">
+            <a:extLst>
+              <a:ext uri="{FF2B5EF4-FFF2-40B4-BE49-F238E27FC236}">
+                <a16:creationId xmlns:a16="http://schemas.microsoft.com/office/drawing/2014/main" id="{268D8CD3-1398-42A5-B3E5-877D5B1943F4}"/>
+              </a:ext>
+            </a:extLst>
+          </p:cNvPr>
+          <p:cNvSpPr/>
+          <p:nvPr/>
+        </p:nvSpPr>
+        <p:spPr>
+          <a:xfrm>
+            <a:off x="1321076" y="3881156"/>
+            <a:ext cx="1251864" cy="606177"/>
+          </a:xfrm>
+          <a:prstGeom prst="rect">
+            <a:avLst/>
+          </a:prstGeom>
+        </p:spPr>
+        <p:style>
+          <a:lnRef idx="2">
+            <a:schemeClr val="accent2"/>
+          </a:lnRef>
+          <a:fillRef idx="1">
+            <a:schemeClr val="lt1"/>
+          </a:fillRef>
+          <a:effectRef idx="0">
+            <a:schemeClr val="accent2"/>
+          </a:effectRef>
+          <a:fontRef idx="minor">
+            <a:schemeClr val="dk1"/>
+          </a:fontRef>
+        </p:style>
+        <p:txBody>
+          <a:bodyPr rtlCol="0" anchor="ctr"/>
+          <a:lstStyle/>
+          <a:p>
+            <a:pPr algn="ctr"/>
+            <a:r>
+              <a:rPr kumimoji="1" lang="en-US" altLang="ja-JP" sz="1100" b="1" dirty="0"/>
+              <a:t>ID</a:t>
+            </a:r>
+            <a:r>
+              <a:rPr kumimoji="1" lang="ja-JP" altLang="en-US" sz="1100" b="1" dirty="0"/>
+              <a:t>割り振り</a:t>
+            </a:r>
+            <a:endParaRPr kumimoji="1" lang="en-US" altLang="ja-JP" sz="1100" b="1" dirty="0"/>
+          </a:p>
+          <a:p>
+            <a:pPr algn="ctr"/>
+            <a:r>
+              <a:rPr lang="ja-JP" altLang="en-US" sz="1100" b="1" dirty="0"/>
+              <a:t>プレイヤー追加</a:t>
+            </a:r>
+            <a:endParaRPr kumimoji="1" lang="ja-JP" altLang="en-US" sz="1100" b="1" dirty="0"/>
           </a:p>
         </p:txBody>
       </p:sp>
     </p:spTree>
     <p:extLst>
       <p:ext uri="{BB962C8B-B14F-4D97-AF65-F5344CB8AC3E}">
-        <p14:creationId xmlns:p14="http://schemas.microsoft.com/office/powerpoint/2010/main" val="410028988"/>
+        <p14:creationId xmlns:p14="http://schemas.microsoft.com/office/powerpoint/2010/main" val="611947490"/>
       </p:ext>
     </p:extLst>
   </p:cSld>
@@ -3794,7 +4169,7 @@
         <p:spPr>
           <a:xfrm>
             <a:off x="567542" y="491954"/>
-            <a:ext cx="4346062" cy="584775"/>
+            <a:ext cx="1826141" cy="584775"/>
           </a:xfrm>
           <a:prstGeom prst="rect">
             <a:avLst/>
@@ -3808,12 +4183,8 @@
           <a:lstStyle/>
           <a:p>
             <a:r>
-              <a:rPr kumimoji="1" lang="en-US" altLang="ja-JP" sz="3200" b="1" u="sng" dirty="0"/>
-              <a:t>Network</a:t>
-            </a:r>
-            <a:r>
               <a:rPr kumimoji="1" lang="ja-JP" altLang="en-US" sz="3200" b="1" u="sng" dirty="0"/>
-              <a:t>オブジェクト</a:t>
+              <a:t>ログイン</a:t>
             </a:r>
           </a:p>
         </p:txBody>
@@ -3833,7 +4204,7 @@
         <p:spPr>
           <a:xfrm>
             <a:off x="567542" y="1216429"/>
-            <a:ext cx="6425157" cy="461665"/>
+            <a:ext cx="6048451" cy="461665"/>
           </a:xfrm>
           <a:prstGeom prst="rect">
             <a:avLst/>
@@ -3847,16 +4218,16 @@
           <a:lstStyle/>
           <a:p>
             <a:r>
-              <a:rPr lang="en-US" altLang="ja-JP" sz="2400" b="1" dirty="0">
+              <a:rPr kumimoji="1" lang="en-US" altLang="ja-JP" sz="2400" b="1" dirty="0" err="1">
                 <a:solidFill>
                   <a:srgbClr val="FF0000"/>
                 </a:solidFill>
               </a:rPr>
-              <a:t>NetworkPlayer.cpp</a:t>
-            </a:r>
-            <a:r>
-              <a:rPr lang="ja-JP" altLang="en-US" sz="2400" dirty="0"/>
-              <a:t>を書きます。（その１）</a:t>
+              <a:t>Server.h</a:t>
+            </a:r>
+            <a:r>
+              <a:rPr kumimoji="1" lang="ja-JP" altLang="en-US" sz="2400" dirty="0"/>
+              <a:t>に途中参加通信処理を書きます。</a:t>
             </a:r>
             <a:endParaRPr lang="en-US" altLang="ja-JP" sz="2400" dirty="0"/>
           </a:p>
@@ -3867,7 +4238,7 @@
           <p:cNvPr id="5" name="図 4">
             <a:extLst>
               <a:ext uri="{FF2B5EF4-FFF2-40B4-BE49-F238E27FC236}">
-                <a16:creationId xmlns:a16="http://schemas.microsoft.com/office/drawing/2014/main" id="{A3A172A7-4C76-4B29-858E-E8E1D4C9C2E0}"/>
+                <a16:creationId xmlns:a16="http://schemas.microsoft.com/office/drawing/2014/main" id="{59048606-92B9-4DAB-8A55-92F753D31C8A}"/>
               </a:ext>
             </a:extLst>
           </p:cNvPr>
@@ -3884,18 +4255,70 @@
         </p:blipFill>
         <p:spPr>
           <a:xfrm>
-            <a:off x="567543" y="1817794"/>
-            <a:ext cx="6294802" cy="4676139"/>
+            <a:off x="567542" y="1817794"/>
+            <a:ext cx="7544853" cy="4353533"/>
           </a:xfrm>
           <a:prstGeom prst="rect">
             <a:avLst/>
           </a:prstGeom>
         </p:spPr>
       </p:pic>
+      <p:sp>
+        <p:nvSpPr>
+          <p:cNvPr id="7" name="正方形/長方形 6">
+            <a:extLst>
+              <a:ext uri="{FF2B5EF4-FFF2-40B4-BE49-F238E27FC236}">
+                <a16:creationId xmlns:a16="http://schemas.microsoft.com/office/drawing/2014/main" id="{544D887C-90C3-45CF-8EBF-4F16B192871D}"/>
+              </a:ext>
+            </a:extLst>
+          </p:cNvPr>
+          <p:cNvSpPr/>
+          <p:nvPr/>
+        </p:nvSpPr>
+        <p:spPr>
+          <a:xfrm>
+            <a:off x="1837267" y="5494866"/>
+            <a:ext cx="5808133" cy="262467"/>
+          </a:xfrm>
+          <a:prstGeom prst="rect">
+            <a:avLst/>
+          </a:prstGeom>
+          <a:noFill/>
+          <a:ln w="38100">
+            <a:solidFill>
+              <a:srgbClr val="FF0000"/>
+            </a:solidFill>
+          </a:ln>
+        </p:spPr>
+        <p:style>
+          <a:lnRef idx="2">
+            <a:schemeClr val="accent1">
+              <a:shade val="50000"/>
+            </a:schemeClr>
+          </a:lnRef>
+          <a:fillRef idx="1">
+            <a:schemeClr val="accent1"/>
+          </a:fillRef>
+          <a:effectRef idx="0">
+            <a:schemeClr val="accent1"/>
+          </a:effectRef>
+          <a:fontRef idx="minor">
+            <a:schemeClr val="lt1"/>
+          </a:fontRef>
+        </p:style>
+        <p:txBody>
+          <a:bodyPr rtlCol="0" anchor="ctr"/>
+          <a:lstStyle/>
+          <a:p>
+            <a:pPr algn="ctr"/>
+            <a:endParaRPr kumimoji="1" lang="ja-JP" altLang="en-US"/>
+          </a:p>
+        </p:txBody>
+      </p:sp>
     </p:spTree>
     <p:extLst>
       <p:ext uri="{BB962C8B-B14F-4D97-AF65-F5344CB8AC3E}">
-        <p14:creationId xmlns:p14="http://schemas.microsoft.com/office/powerpoint/2010/main" val="594064404"/>
+        <p14:creationId xmlns:p14="http://schemas.microsoft.com/office/powerpoint/2010/main" val="1085370863"/>
       </p:ext>
     </p:extLst>
   </p:cSld>
@@ -3937,7 +4360,7 @@
         <p:spPr>
           <a:xfrm>
             <a:off x="567542" y="491954"/>
-            <a:ext cx="4346062" cy="584775"/>
+            <a:ext cx="1826141" cy="584775"/>
           </a:xfrm>
           <a:prstGeom prst="rect">
             <a:avLst/>
@@ -3951,12 +4374,8 @@
           <a:lstStyle/>
           <a:p>
             <a:r>
-              <a:rPr kumimoji="1" lang="en-US" altLang="ja-JP" sz="3200" b="1" u="sng" dirty="0"/>
-              <a:t>Network</a:t>
-            </a:r>
-            <a:r>
               <a:rPr kumimoji="1" lang="ja-JP" altLang="en-US" sz="3200" b="1" u="sng" dirty="0"/>
-              <a:t>オブジェクト</a:t>
+              <a:t>ログイン</a:t>
             </a:r>
           </a:p>
         </p:txBody>
@@ -3976,7 +4395,7 @@
         <p:spPr>
           <a:xfrm>
             <a:off x="567542" y="1216429"/>
-            <a:ext cx="6425157" cy="461665"/>
+            <a:ext cx="4867038" cy="461665"/>
           </a:xfrm>
           <a:prstGeom prst="rect">
             <a:avLst/>
@@ -3990,16 +4409,16 @@
           <a:lstStyle/>
           <a:p>
             <a:r>
-              <a:rPr lang="en-US" altLang="ja-JP" sz="2400" b="1" dirty="0">
+              <a:rPr kumimoji="1" lang="en-US" altLang="ja-JP" sz="2400" b="1" dirty="0">
                 <a:solidFill>
                   <a:srgbClr val="FF0000"/>
                 </a:solidFill>
               </a:rPr>
-              <a:t>NetworkPlayer.cpp</a:t>
-            </a:r>
-            <a:r>
-              <a:rPr lang="ja-JP" altLang="en-US" sz="2400" dirty="0"/>
-              <a:t>を書きます。（その２）</a:t>
+              <a:t>Server.cpp</a:t>
+            </a:r>
+            <a:r>
+              <a:rPr kumimoji="1" lang="ja-JP" altLang="en-US" sz="2400" dirty="0"/>
+              <a:t>を書きます（その１）</a:t>
             </a:r>
             <a:endParaRPr lang="en-US" altLang="ja-JP" sz="2400" dirty="0"/>
           </a:p>
@@ -4010,7 +4429,7 @@
           <p:cNvPr id="3" name="図 2">
             <a:extLst>
               <a:ext uri="{FF2B5EF4-FFF2-40B4-BE49-F238E27FC236}">
-                <a16:creationId xmlns:a16="http://schemas.microsoft.com/office/drawing/2014/main" id="{4D9D0D18-CC7D-40F1-BA01-5436D0F18B94}"/>
+                <a16:creationId xmlns:a16="http://schemas.microsoft.com/office/drawing/2014/main" id="{CD0EF882-F505-4A50-91B8-E1BE5B75A0F2}"/>
               </a:ext>
             </a:extLst>
           </p:cNvPr>
@@ -4028,7 +4447,7 @@
         <p:spPr>
           <a:xfrm>
             <a:off x="567542" y="1817794"/>
-            <a:ext cx="5546375" cy="4769273"/>
+            <a:ext cx="8570350" cy="4642273"/>
           </a:xfrm>
           <a:prstGeom prst="rect">
             <a:avLst/>
@@ -4038,7 +4457,7 @@
     </p:spTree>
     <p:extLst>
       <p:ext uri="{BB962C8B-B14F-4D97-AF65-F5344CB8AC3E}">
-        <p14:creationId xmlns:p14="http://schemas.microsoft.com/office/powerpoint/2010/main" val="3520594521"/>
+        <p14:creationId xmlns:p14="http://schemas.microsoft.com/office/powerpoint/2010/main" val="4131053719"/>
       </p:ext>
     </p:extLst>
   </p:cSld>
@@ -4080,7 +4499,7 @@
         <p:spPr>
           <a:xfrm>
             <a:off x="567542" y="491954"/>
-            <a:ext cx="4346062" cy="584775"/>
+            <a:ext cx="1826141" cy="584775"/>
           </a:xfrm>
           <a:prstGeom prst="rect">
             <a:avLst/>
@@ -4094,12 +4513,8 @@
           <a:lstStyle/>
           <a:p>
             <a:r>
-              <a:rPr kumimoji="1" lang="en-US" altLang="ja-JP" sz="3200" b="1" u="sng" dirty="0"/>
-              <a:t>Network</a:t>
-            </a:r>
-            <a:r>
               <a:rPr kumimoji="1" lang="ja-JP" altLang="en-US" sz="3200" b="1" u="sng" dirty="0"/>
-              <a:t>オブジェクト</a:t>
+              <a:t>ログイン</a:t>
             </a:r>
           </a:p>
         </p:txBody>
@@ -4119,7 +4534,7 @@
         <p:spPr>
           <a:xfrm>
             <a:off x="567542" y="1216429"/>
-            <a:ext cx="10033516" cy="1200329"/>
+            <a:ext cx="4867038" cy="461665"/>
           </a:xfrm>
           <a:prstGeom prst="rect">
             <a:avLst/>
@@ -4133,30 +4548,16 @@
           <a:lstStyle/>
           <a:p>
             <a:r>
-              <a:rPr lang="ja-JP" altLang="en-US" sz="2400" dirty="0"/>
-              <a:t>プレイヤーは複数画面に出現します。よって、</a:t>
-            </a:r>
-            <a:endParaRPr lang="en-US" altLang="ja-JP" sz="2400" dirty="0"/>
-          </a:p>
-          <a:p>
-            <a:r>
-              <a:rPr lang="ja-JP" altLang="en-US" sz="2400" b="1" dirty="0">
+              <a:rPr kumimoji="1" lang="en-US" altLang="ja-JP" sz="2400" b="1" dirty="0">
                 <a:solidFill>
                   <a:srgbClr val="FF0000"/>
                 </a:solidFill>
               </a:rPr>
-              <a:t>自分が操作するのがどれなのか判別するフラグ</a:t>
-            </a:r>
-            <a:r>
-              <a:rPr lang="ja-JP" altLang="en-US" sz="2400" dirty="0"/>
-              <a:t>が必ず必要になります。</a:t>
-            </a:r>
-            <a:endParaRPr lang="en-US" altLang="ja-JP" sz="2400" dirty="0"/>
-          </a:p>
-          <a:p>
-            <a:r>
-              <a:rPr lang="ja-JP" altLang="en-US" sz="2400" dirty="0"/>
-              <a:t>これがなければ、他人のプレイヤーを操作してしまいます。</a:t>
+              <a:t>Server.cpp</a:t>
+            </a:r>
+            <a:r>
+              <a:rPr kumimoji="1" lang="ja-JP" altLang="en-US" sz="2400" dirty="0"/>
+              <a:t>を書きます（その２）</a:t>
             </a:r>
             <a:endParaRPr lang="en-US" altLang="ja-JP" sz="2400" dirty="0"/>
           </a:p>
@@ -4167,7 +4568,7 @@
           <p:cNvPr id="5" name="図 4">
             <a:extLst>
               <a:ext uri="{FF2B5EF4-FFF2-40B4-BE49-F238E27FC236}">
-                <a16:creationId xmlns:a16="http://schemas.microsoft.com/office/drawing/2014/main" id="{9340EF10-6C8E-4651-B94E-E05DD52947CD}"/>
+                <a16:creationId xmlns:a16="http://schemas.microsoft.com/office/drawing/2014/main" id="{003024E6-7912-40E0-94CA-2CA029DCD348}"/>
               </a:ext>
             </a:extLst>
           </p:cNvPr>
@@ -4184,8 +4585,8 @@
         </p:blipFill>
         <p:spPr>
           <a:xfrm>
-            <a:off x="567542" y="2555132"/>
-            <a:ext cx="5491054" cy="3810914"/>
+            <a:off x="567542" y="1817794"/>
+            <a:ext cx="5654790" cy="4548252"/>
           </a:xfrm>
           <a:prstGeom prst="rect">
             <a:avLst/>
@@ -4197,7 +4598,7 @@
           <p:cNvPr id="7" name="正方形/長方形 6">
             <a:extLst>
               <a:ext uri="{FF2B5EF4-FFF2-40B4-BE49-F238E27FC236}">
-                <a16:creationId xmlns:a16="http://schemas.microsoft.com/office/drawing/2014/main" id="{52D6B58B-BA9B-48C7-ACB5-04DEBBACCB4E}"/>
+                <a16:creationId xmlns:a16="http://schemas.microsoft.com/office/drawing/2014/main" id="{D3F65021-2915-4D9B-8410-EE6551BD08B5}"/>
               </a:ext>
             </a:extLst>
           </p:cNvPr>
@@ -4206,14 +4607,14 @@
         </p:nvSpPr>
         <p:spPr>
           <a:xfrm>
-            <a:off x="1075267" y="5571067"/>
-            <a:ext cx="3987800" cy="186266"/>
+            <a:off x="1557867" y="5969000"/>
+            <a:ext cx="2125133" cy="262467"/>
           </a:xfrm>
           <a:prstGeom prst="rect">
             <a:avLst/>
           </a:prstGeom>
           <a:noFill/>
-          <a:ln w="28575">
+          <a:ln w="38100">
             <a:solidFill>
               <a:srgbClr val="FF0000"/>
             </a:solidFill>
@@ -4244,64 +4645,10 @@
           </a:p>
         </p:txBody>
       </p:sp>
-      <p:sp>
-        <p:nvSpPr>
-          <p:cNvPr id="8" name="テキスト ボックス 7">
-            <a:extLst>
-              <a:ext uri="{FF2B5EF4-FFF2-40B4-BE49-F238E27FC236}">
-                <a16:creationId xmlns:a16="http://schemas.microsoft.com/office/drawing/2014/main" id="{65F881A2-6200-44E4-A491-2235DFAA401C}"/>
-              </a:ext>
-            </a:extLst>
-          </p:cNvPr>
-          <p:cNvSpPr txBox="1"/>
-          <p:nvPr/>
-        </p:nvSpPr>
-        <p:spPr>
-          <a:xfrm>
-            <a:off x="6959875" y="5341834"/>
-            <a:ext cx="3581430" cy="830997"/>
-          </a:xfrm>
-          <a:prstGeom prst="rect">
-            <a:avLst/>
-          </a:prstGeom>
-          <a:noFill/>
-        </p:spPr>
-        <p:txBody>
-          <a:bodyPr wrap="none" rtlCol="0">
-            <a:spAutoFit/>
-          </a:bodyPr>
-          <a:lstStyle/>
-          <a:p>
-            <a:r>
-              <a:rPr lang="en-US" altLang="ja-JP" sz="2400" b="1" dirty="0">
-                <a:solidFill>
-                  <a:srgbClr val="00B050"/>
-                </a:solidFill>
-              </a:rPr>
-              <a:t>MEMO</a:t>
-            </a:r>
-          </a:p>
-          <a:p>
-            <a:r>
-              <a:rPr lang="ja-JP" altLang="en-US" sz="2400" dirty="0"/>
-              <a:t>同様に識別</a:t>
-            </a:r>
-            <a:r>
-              <a:rPr lang="en-US" altLang="ja-JP" sz="2400" dirty="0"/>
-              <a:t>ID</a:t>
-            </a:r>
-            <a:r>
-              <a:rPr lang="ja-JP" altLang="en-US" sz="2400" dirty="0"/>
-              <a:t>も必要です</a:t>
-            </a:r>
-            <a:endParaRPr lang="en-US" altLang="ja-JP" sz="2400" dirty="0"/>
-          </a:p>
-        </p:txBody>
-      </p:sp>
     </p:spTree>
     <p:extLst>
       <p:ext uri="{BB962C8B-B14F-4D97-AF65-F5344CB8AC3E}">
-        <p14:creationId xmlns:p14="http://schemas.microsoft.com/office/powerpoint/2010/main" val="105478878"/>
+        <p14:creationId xmlns:p14="http://schemas.microsoft.com/office/powerpoint/2010/main" val="2999391252"/>
       </p:ext>
     </p:extLst>
   </p:cSld>
@@ -4343,7 +4690,7 @@
         <p:spPr>
           <a:xfrm>
             <a:off x="567542" y="491954"/>
-            <a:ext cx="4346062" cy="584775"/>
+            <a:ext cx="1826141" cy="584775"/>
           </a:xfrm>
           <a:prstGeom prst="rect">
             <a:avLst/>
@@ -4357,12 +4704,8 @@
           <a:lstStyle/>
           <a:p>
             <a:r>
-              <a:rPr kumimoji="1" lang="en-US" altLang="ja-JP" sz="3200" b="1" u="sng" dirty="0"/>
-              <a:t>Network</a:t>
-            </a:r>
-            <a:r>
               <a:rPr kumimoji="1" lang="ja-JP" altLang="en-US" sz="3200" b="1" u="sng" dirty="0"/>
-              <a:t>オブジェクト</a:t>
+              <a:t>ログイン</a:t>
             </a:r>
           </a:p>
         </p:txBody>
@@ -4382,7 +4725,7 @@
         <p:spPr>
           <a:xfrm>
             <a:off x="567542" y="1216429"/>
-            <a:ext cx="6955750" cy="1200329"/>
+            <a:ext cx="6348213" cy="461665"/>
           </a:xfrm>
           <a:prstGeom prst="rect">
             <a:avLst/>
@@ -4396,30 +4739,32 @@
           <a:lstStyle/>
           <a:p>
             <a:r>
-              <a:rPr lang="ja-JP" altLang="en-US" sz="2400" dirty="0"/>
-              <a:t>オンラインでのキャラクターの描画は、</a:t>
-            </a:r>
-            <a:endParaRPr lang="en-US" altLang="ja-JP" sz="2400" dirty="0"/>
-          </a:p>
-          <a:p>
-            <a:r>
-              <a:rPr lang="ja-JP" altLang="en-US" sz="2400" b="1" dirty="0">
+              <a:rPr kumimoji="1" lang="en-US" altLang="ja-JP" sz="2400" b="1" dirty="0">
                 <a:solidFill>
                   <a:srgbClr val="FF0000"/>
                 </a:solidFill>
               </a:rPr>
-              <a:t>サーバーから送られてきた座標で描画</a:t>
-            </a:r>
-            <a:r>
-              <a:rPr lang="ja-JP" altLang="en-US" sz="2400" dirty="0"/>
-              <a:t>します。</a:t>
-            </a:r>
-            <a:endParaRPr lang="en-US" altLang="ja-JP" sz="2400" dirty="0"/>
-          </a:p>
-          <a:p>
-            <a:r>
-              <a:rPr lang="ja-JP" altLang="en-US" sz="2400" dirty="0"/>
-              <a:t>今回はそれ専用のメンバ変数を用意しています。</a:t>
+              <a:t>Client</a:t>
+            </a:r>
+            <a:r>
+              <a:rPr kumimoji="1" lang="ja-JP" altLang="en-US" sz="2400" b="1" dirty="0">
+                <a:solidFill>
+                  <a:srgbClr val="FF0000"/>
+                </a:solidFill>
+              </a:rPr>
+              <a:t>側の</a:t>
+            </a:r>
+            <a:r>
+              <a:rPr kumimoji="1" lang="en-US" altLang="ja-JP" sz="2400" b="1" dirty="0" err="1">
+                <a:solidFill>
+                  <a:srgbClr val="FF0000"/>
+                </a:solidFill>
+              </a:rPr>
+              <a:t>NetworkPlayScene.h</a:t>
+            </a:r>
+            <a:r>
+              <a:rPr kumimoji="1" lang="ja-JP" altLang="en-US" sz="2400" dirty="0"/>
+              <a:t>を書きます</a:t>
             </a:r>
             <a:endParaRPr lang="en-US" altLang="ja-JP" sz="2400" dirty="0"/>
           </a:p>
@@ -4427,10 +4772,10 @@
       </p:sp>
       <p:pic>
         <p:nvPicPr>
-          <p:cNvPr id="3" name="図 2">
-            <a:extLst>
-              <a:ext uri="{FF2B5EF4-FFF2-40B4-BE49-F238E27FC236}">
-                <a16:creationId xmlns:a16="http://schemas.microsoft.com/office/drawing/2014/main" id="{5075CC17-7554-4FBF-AC5F-DEA22BA92646}"/>
+          <p:cNvPr id="5" name="図 4">
+            <a:extLst>
+              <a:ext uri="{FF2B5EF4-FFF2-40B4-BE49-F238E27FC236}">
+                <a16:creationId xmlns:a16="http://schemas.microsoft.com/office/drawing/2014/main" id="{461C8568-6C37-48EF-8477-22EA16678F3E}"/>
               </a:ext>
             </a:extLst>
           </p:cNvPr>
@@ -4447,18 +4792,70 @@
         </p:blipFill>
         <p:spPr>
           <a:xfrm>
-            <a:off x="567542" y="2556458"/>
-            <a:ext cx="6163535" cy="2400635"/>
+            <a:off x="567542" y="1817793"/>
+            <a:ext cx="6478288" cy="4396739"/>
           </a:xfrm>
           <a:prstGeom prst="rect">
             <a:avLst/>
           </a:prstGeom>
         </p:spPr>
       </p:pic>
+      <p:sp>
+        <p:nvSpPr>
+          <p:cNvPr id="7" name="正方形/長方形 6">
+            <a:extLst>
+              <a:ext uri="{FF2B5EF4-FFF2-40B4-BE49-F238E27FC236}">
+                <a16:creationId xmlns:a16="http://schemas.microsoft.com/office/drawing/2014/main" id="{5A31B988-8540-4BE3-A55A-6CEFCCD2E4B2}"/>
+              </a:ext>
+            </a:extLst>
+          </p:cNvPr>
+          <p:cNvSpPr/>
+          <p:nvPr/>
+        </p:nvSpPr>
+        <p:spPr>
+          <a:xfrm>
+            <a:off x="1871135" y="5698065"/>
+            <a:ext cx="3107266" cy="262467"/>
+          </a:xfrm>
+          <a:prstGeom prst="rect">
+            <a:avLst/>
+          </a:prstGeom>
+          <a:noFill/>
+          <a:ln w="38100">
+            <a:solidFill>
+              <a:srgbClr val="FF0000"/>
+            </a:solidFill>
+          </a:ln>
+        </p:spPr>
+        <p:style>
+          <a:lnRef idx="2">
+            <a:schemeClr val="accent1">
+              <a:shade val="50000"/>
+            </a:schemeClr>
+          </a:lnRef>
+          <a:fillRef idx="1">
+            <a:schemeClr val="accent1"/>
+          </a:fillRef>
+          <a:effectRef idx="0">
+            <a:schemeClr val="accent1"/>
+          </a:effectRef>
+          <a:fontRef idx="minor">
+            <a:schemeClr val="lt1"/>
+          </a:fontRef>
+        </p:style>
+        <p:txBody>
+          <a:bodyPr rtlCol="0" anchor="ctr"/>
+          <a:lstStyle/>
+          <a:p>
+            <a:pPr algn="ctr"/>
+            <a:endParaRPr kumimoji="1" lang="ja-JP" altLang="en-US"/>
+          </a:p>
+        </p:txBody>
+      </p:sp>
     </p:spTree>
     <p:extLst>
       <p:ext uri="{BB962C8B-B14F-4D97-AF65-F5344CB8AC3E}">
-        <p14:creationId xmlns:p14="http://schemas.microsoft.com/office/powerpoint/2010/main" val="3048425996"/>
+        <p14:creationId xmlns:p14="http://schemas.microsoft.com/office/powerpoint/2010/main" val="697637318"/>
       </p:ext>
     </p:extLst>
   </p:cSld>
@@ -4500,7 +4897,7 @@
         <p:spPr>
           <a:xfrm>
             <a:off x="567542" y="491954"/>
-            <a:ext cx="4346062" cy="584775"/>
+            <a:ext cx="1826141" cy="584775"/>
           </a:xfrm>
           <a:prstGeom prst="rect">
             <a:avLst/>
@@ -4514,12 +4911,8 @@
           <a:lstStyle/>
           <a:p>
             <a:r>
-              <a:rPr kumimoji="1" lang="en-US" altLang="ja-JP" sz="3200" b="1" u="sng" dirty="0"/>
-              <a:t>Network</a:t>
-            </a:r>
-            <a:r>
               <a:rPr kumimoji="1" lang="ja-JP" altLang="en-US" sz="3200" b="1" u="sng" dirty="0"/>
-              <a:t>オブジェクト</a:t>
+              <a:t>ログイン</a:t>
             </a:r>
           </a:p>
         </p:txBody>
@@ -4539,7 +4932,7 @@
         <p:spPr>
           <a:xfrm>
             <a:off x="567542" y="1216429"/>
-            <a:ext cx="10341293" cy="2677656"/>
+            <a:ext cx="5203669" cy="461665"/>
           </a:xfrm>
           <a:prstGeom prst="rect">
             <a:avLst/>
@@ -4553,55 +4946,1163 @@
           <a:lstStyle/>
           <a:p>
             <a:r>
-              <a:rPr lang="ja-JP" altLang="en-US" sz="2400" dirty="0"/>
-              <a:t>いずれのクラスも、オフライン用に実装されたクラスを継承しています。</a:t>
+              <a:rPr kumimoji="1" lang="en-US" altLang="ja-JP" sz="2400" b="1" dirty="0">
+                <a:solidFill>
+                  <a:srgbClr val="FF0000"/>
+                </a:solidFill>
+              </a:rPr>
+              <a:t>NetworkPlayScene.cpp</a:t>
+            </a:r>
+            <a:r>
+              <a:rPr kumimoji="1" lang="ja-JP" altLang="en-US" sz="2400" dirty="0"/>
+              <a:t>を書きます</a:t>
             </a:r>
             <a:endParaRPr lang="en-US" altLang="ja-JP" sz="2400" dirty="0"/>
           </a:p>
-          <a:p>
-            <a:r>
-              <a:rPr lang="ja-JP" altLang="en-US" sz="2400" dirty="0"/>
-              <a:t>これにより、非常にメンテナンスしやすい設計となり、</a:t>
-            </a:r>
-            <a:endParaRPr lang="en-US" altLang="ja-JP" sz="2400" dirty="0"/>
-          </a:p>
-          <a:p>
-            <a:r>
-              <a:rPr lang="ja-JP" altLang="en-US" sz="2400" dirty="0"/>
-              <a:t>不具合がでにくかったり、不具合が出ても調査が簡単だったりします。</a:t>
-            </a:r>
-            <a:endParaRPr lang="en-US" altLang="ja-JP" sz="2400" dirty="0"/>
-          </a:p>
-          <a:p>
-            <a:endParaRPr lang="en-US" altLang="ja-JP" sz="2400" dirty="0"/>
-          </a:p>
-          <a:p>
-            <a:r>
-              <a:rPr lang="ja-JP" altLang="en-US" sz="2400" dirty="0"/>
-              <a:t>ネットワークプログラムはクライアントとサーバー両方で作成するので、</a:t>
-            </a:r>
-            <a:endParaRPr lang="en-US" altLang="ja-JP" sz="2400" dirty="0"/>
-          </a:p>
-          <a:p>
-            <a:r>
-              <a:rPr lang="ja-JP" altLang="en-US" sz="2400" dirty="0"/>
-              <a:t>とても複雑になりやすいです。</a:t>
-            </a:r>
-            <a:endParaRPr lang="en-US" altLang="ja-JP" sz="2400" dirty="0"/>
-          </a:p>
-          <a:p>
-            <a:r>
-              <a:rPr lang="ja-JP" altLang="en-US" sz="2400" dirty="0"/>
-              <a:t>設計面で少しでもきれいに組めるように、工夫していきましょう。</a:t>
-            </a:r>
-            <a:endParaRPr lang="en-US" altLang="ja-JP" sz="2400" dirty="0"/>
+        </p:txBody>
+      </p:sp>
+      <p:pic>
+        <p:nvPicPr>
+          <p:cNvPr id="3" name="図 2">
+            <a:extLst>
+              <a:ext uri="{FF2B5EF4-FFF2-40B4-BE49-F238E27FC236}">
+                <a16:creationId xmlns:a16="http://schemas.microsoft.com/office/drawing/2014/main" id="{40158515-6B6E-4C12-A5E8-4574B1F07EDC}"/>
+              </a:ext>
+            </a:extLst>
+          </p:cNvPr>
+          <p:cNvPicPr>
+            <a:picLocks noChangeAspect="1"/>
+          </p:cNvPicPr>
+          <p:nvPr/>
+        </p:nvPicPr>
+        <p:blipFill>
+          <a:blip r:embed="rId2"/>
+          <a:stretch>
+            <a:fillRect/>
+          </a:stretch>
+        </p:blipFill>
+        <p:spPr>
+          <a:xfrm>
+            <a:off x="567542" y="1817793"/>
+            <a:ext cx="9868189" cy="2508673"/>
+          </a:xfrm>
+          <a:prstGeom prst="rect">
+            <a:avLst/>
+          </a:prstGeom>
+        </p:spPr>
+      </p:pic>
+      <p:pic>
+        <p:nvPicPr>
+          <p:cNvPr id="9" name="図 8">
+            <a:extLst>
+              <a:ext uri="{FF2B5EF4-FFF2-40B4-BE49-F238E27FC236}">
+                <a16:creationId xmlns:a16="http://schemas.microsoft.com/office/drawing/2014/main" id="{EAAD78F3-D597-4B31-8AB0-7453955DA3F6}"/>
+              </a:ext>
+            </a:extLst>
+          </p:cNvPr>
+          <p:cNvPicPr>
+            <a:picLocks noChangeAspect="1"/>
+          </p:cNvPicPr>
+          <p:nvPr/>
+        </p:nvPicPr>
+        <p:blipFill>
+          <a:blip r:embed="rId3"/>
+          <a:stretch>
+            <a:fillRect/>
+          </a:stretch>
+        </p:blipFill>
+        <p:spPr>
+          <a:xfrm>
+            <a:off x="567542" y="4851360"/>
+            <a:ext cx="9702722" cy="1625640"/>
+          </a:xfrm>
+          <a:prstGeom prst="rect">
+            <a:avLst/>
+          </a:prstGeom>
+        </p:spPr>
+      </p:pic>
+      <p:cxnSp>
+        <p:nvCxnSpPr>
+          <p:cNvPr id="11" name="直線コネクタ 10">
+            <a:extLst>
+              <a:ext uri="{FF2B5EF4-FFF2-40B4-BE49-F238E27FC236}">
+                <a16:creationId xmlns:a16="http://schemas.microsoft.com/office/drawing/2014/main" id="{7684C983-D7F1-43AD-8FD0-F86915C64292}"/>
+              </a:ext>
+            </a:extLst>
+          </p:cNvPr>
+          <p:cNvCxnSpPr/>
+          <p:nvPr/>
+        </p:nvCxnSpPr>
+        <p:spPr>
+          <a:xfrm flipV="1">
+            <a:off x="402075" y="4402667"/>
+            <a:ext cx="10613058" cy="0"/>
+          </a:xfrm>
+          <a:prstGeom prst="line">
+            <a:avLst/>
+          </a:prstGeom>
+        </p:spPr>
+        <p:style>
+          <a:lnRef idx="1">
+            <a:schemeClr val="accent1"/>
+          </a:lnRef>
+          <a:fillRef idx="0">
+            <a:schemeClr val="accent1"/>
+          </a:fillRef>
+          <a:effectRef idx="0">
+            <a:schemeClr val="accent1"/>
+          </a:effectRef>
+          <a:fontRef idx="minor">
+            <a:schemeClr val="tx1"/>
+          </a:fontRef>
+        </p:style>
+      </p:cxnSp>
+      <p:sp>
+        <p:nvSpPr>
+          <p:cNvPr id="12" name="正方形/長方形 11">
+            <a:extLst>
+              <a:ext uri="{FF2B5EF4-FFF2-40B4-BE49-F238E27FC236}">
+                <a16:creationId xmlns:a16="http://schemas.microsoft.com/office/drawing/2014/main" id="{4FD02358-77E3-47C1-A6DF-3046BFFA586D}"/>
+              </a:ext>
+            </a:extLst>
+          </p:cNvPr>
+          <p:cNvSpPr/>
+          <p:nvPr/>
+        </p:nvSpPr>
+        <p:spPr>
+          <a:xfrm>
+            <a:off x="2663944" y="5516012"/>
+            <a:ext cx="7606319" cy="262467"/>
+          </a:xfrm>
+          <a:prstGeom prst="rect">
+            <a:avLst/>
+          </a:prstGeom>
+          <a:noFill/>
+          <a:ln w="38100">
+            <a:solidFill>
+              <a:srgbClr val="FF0000"/>
+            </a:solidFill>
+          </a:ln>
+        </p:spPr>
+        <p:style>
+          <a:lnRef idx="2">
+            <a:schemeClr val="accent1">
+              <a:shade val="50000"/>
+            </a:schemeClr>
+          </a:lnRef>
+          <a:fillRef idx="1">
+            <a:schemeClr val="accent1"/>
+          </a:fillRef>
+          <a:effectRef idx="0">
+            <a:schemeClr val="accent1"/>
+          </a:effectRef>
+          <a:fontRef idx="minor">
+            <a:schemeClr val="lt1"/>
+          </a:fontRef>
+        </p:style>
+        <p:txBody>
+          <a:bodyPr rtlCol="0" anchor="ctr"/>
+          <a:lstStyle/>
+          <a:p>
+            <a:pPr algn="ctr"/>
+            <a:endParaRPr kumimoji="1" lang="ja-JP" altLang="en-US"/>
           </a:p>
         </p:txBody>
       </p:sp>
     </p:spTree>
     <p:extLst>
       <p:ext uri="{BB962C8B-B14F-4D97-AF65-F5344CB8AC3E}">
-        <p14:creationId xmlns:p14="http://schemas.microsoft.com/office/powerpoint/2010/main" val="3575746210"/>
+        <p14:creationId xmlns:p14="http://schemas.microsoft.com/office/powerpoint/2010/main" val="3348927828"/>
+      </p:ext>
+    </p:extLst>
+  </p:cSld>
+  <p:clrMapOvr>
+    <a:masterClrMapping/>
+  </p:clrMapOvr>
+</p:sld>
+</file>
+
+<file path=ppt/slides/slide15.xml><?xml version="1.0" encoding="utf-8"?>
+<p:sld xmlns:a="http://schemas.openxmlformats.org/drawingml/2006/main" xmlns:r="http://schemas.openxmlformats.org/officeDocument/2006/relationships" xmlns:p="http://schemas.openxmlformats.org/presentationml/2006/main">
+  <p:cSld>
+    <p:spTree>
+      <p:nvGrpSpPr>
+        <p:cNvPr id="1" name=""/>
+        <p:cNvGrpSpPr/>
+        <p:nvPr/>
+      </p:nvGrpSpPr>
+      <p:grpSpPr>
+        <a:xfrm>
+          <a:off x="0" y="0"/>
+          <a:ext cx="0" cy="0"/>
+          <a:chOff x="0" y="0"/>
+          <a:chExt cx="0" cy="0"/>
+        </a:xfrm>
+      </p:grpSpPr>
+      <p:sp>
+        <p:nvSpPr>
+          <p:cNvPr id="4" name="テキスト ボックス 3">
+            <a:extLst>
+              <a:ext uri="{FF2B5EF4-FFF2-40B4-BE49-F238E27FC236}">
+                <a16:creationId xmlns:a16="http://schemas.microsoft.com/office/drawing/2014/main" id="{5A13BF46-B8C5-48AA-8308-C9ECFF431A18}"/>
+              </a:ext>
+            </a:extLst>
+          </p:cNvPr>
+          <p:cNvSpPr txBox="1"/>
+          <p:nvPr/>
+        </p:nvSpPr>
+        <p:spPr>
+          <a:xfrm>
+            <a:off x="567542" y="491954"/>
+            <a:ext cx="2763898" cy="584775"/>
+          </a:xfrm>
+          <a:prstGeom prst="rect">
+            <a:avLst/>
+          </a:prstGeom>
+          <a:noFill/>
+        </p:spPr>
+        <p:txBody>
+          <a:bodyPr wrap="none" rtlCol="0">
+            <a:spAutoFit/>
+          </a:bodyPr>
+          <a:lstStyle/>
+          <a:p>
+            <a:r>
+              <a:rPr kumimoji="1" lang="ja-JP" altLang="en-US" sz="3200" b="1" u="sng" dirty="0"/>
+              <a:t>ログイン 練習</a:t>
+            </a:r>
+          </a:p>
+        </p:txBody>
+      </p:sp>
+      <p:sp>
+        <p:nvSpPr>
+          <p:cNvPr id="6" name="テキスト ボックス 5">
+            <a:extLst>
+              <a:ext uri="{FF2B5EF4-FFF2-40B4-BE49-F238E27FC236}">
+                <a16:creationId xmlns:a16="http://schemas.microsoft.com/office/drawing/2014/main" id="{55830AD6-028B-4C4E-80BF-B70DFC1C3A46}"/>
+              </a:ext>
+            </a:extLst>
+          </p:cNvPr>
+          <p:cNvSpPr txBox="1"/>
+          <p:nvPr/>
+        </p:nvSpPr>
+        <p:spPr>
+          <a:xfrm>
+            <a:off x="567542" y="1216429"/>
+            <a:ext cx="9110186" cy="461665"/>
+          </a:xfrm>
+          <a:prstGeom prst="rect">
+            <a:avLst/>
+          </a:prstGeom>
+          <a:noFill/>
+        </p:spPr>
+        <p:txBody>
+          <a:bodyPr wrap="none" rtlCol="0">
+            <a:spAutoFit/>
+          </a:bodyPr>
+          <a:lstStyle/>
+          <a:p>
+            <a:r>
+              <a:rPr kumimoji="1" lang="ja-JP" altLang="en-US" sz="2400" dirty="0"/>
+              <a:t>これまでのプログラムを参考に</a:t>
+            </a:r>
+            <a:r>
+              <a:rPr kumimoji="1" lang="ja-JP" altLang="en-US" sz="2400" b="1" dirty="0">
+                <a:solidFill>
+                  <a:srgbClr val="FF0000"/>
+                </a:solidFill>
+              </a:rPr>
+              <a:t>ログアウト処理</a:t>
+            </a:r>
+            <a:r>
+              <a:rPr kumimoji="1" lang="ja-JP" altLang="en-US" sz="2400" dirty="0"/>
+              <a:t>を作りましょう。</a:t>
+            </a:r>
+            <a:endParaRPr kumimoji="1" lang="en-US" altLang="ja-JP" sz="2400" dirty="0"/>
+          </a:p>
+        </p:txBody>
+      </p:sp>
+      <p:sp>
+        <p:nvSpPr>
+          <p:cNvPr id="7" name="テキスト ボックス 6">
+            <a:extLst>
+              <a:ext uri="{FF2B5EF4-FFF2-40B4-BE49-F238E27FC236}">
+                <a16:creationId xmlns:a16="http://schemas.microsoft.com/office/drawing/2014/main" id="{3BC32E2B-08FB-4C85-9154-A673C707A66E}"/>
+              </a:ext>
+            </a:extLst>
+          </p:cNvPr>
+          <p:cNvSpPr txBox="1"/>
+          <p:nvPr/>
+        </p:nvSpPr>
+        <p:spPr>
+          <a:xfrm>
+            <a:off x="788190" y="2925233"/>
+            <a:ext cx="1556836" cy="338554"/>
+          </a:xfrm>
+          <a:prstGeom prst="rect">
+            <a:avLst/>
+          </a:prstGeom>
+          <a:noFill/>
+        </p:spPr>
+        <p:txBody>
+          <a:bodyPr wrap="none" rtlCol="0">
+            <a:spAutoFit/>
+          </a:bodyPr>
+          <a:lstStyle/>
+          <a:p>
+            <a:r>
+              <a:rPr kumimoji="1" lang="ja-JP" altLang="en-US" sz="1600" b="1" dirty="0">
+                <a:solidFill>
+                  <a:srgbClr val="0070C0"/>
+                </a:solidFill>
+              </a:rPr>
+              <a:t>クライアント</a:t>
+            </a:r>
+            <a:r>
+              <a:rPr kumimoji="1" lang="en-US" altLang="ja-JP" sz="1600" b="1" dirty="0">
+                <a:solidFill>
+                  <a:srgbClr val="0070C0"/>
+                </a:solidFill>
+              </a:rPr>
+              <a:t>A</a:t>
+            </a:r>
+            <a:endParaRPr lang="en-US" altLang="ja-JP" sz="1600" b="1" dirty="0">
+              <a:solidFill>
+                <a:srgbClr val="0070C0"/>
+              </a:solidFill>
+            </a:endParaRPr>
+          </a:p>
+        </p:txBody>
+      </p:sp>
+      <p:sp>
+        <p:nvSpPr>
+          <p:cNvPr id="5" name="正方形/長方形 4">
+            <a:extLst>
+              <a:ext uri="{FF2B5EF4-FFF2-40B4-BE49-F238E27FC236}">
+                <a16:creationId xmlns:a16="http://schemas.microsoft.com/office/drawing/2014/main" id="{669CE799-BA1F-420A-A338-12FBE6C15727}"/>
+              </a:ext>
+            </a:extLst>
+          </p:cNvPr>
+          <p:cNvSpPr/>
+          <p:nvPr/>
+        </p:nvSpPr>
+        <p:spPr>
+          <a:xfrm>
+            <a:off x="567542" y="3429000"/>
+            <a:ext cx="1998133" cy="2346887"/>
+          </a:xfrm>
+          <a:prstGeom prst="rect">
+            <a:avLst/>
+          </a:prstGeom>
+        </p:spPr>
+        <p:style>
+          <a:lnRef idx="2">
+            <a:schemeClr val="accent1">
+              <a:shade val="50000"/>
+            </a:schemeClr>
+          </a:lnRef>
+          <a:fillRef idx="1">
+            <a:schemeClr val="accent1"/>
+          </a:fillRef>
+          <a:effectRef idx="0">
+            <a:schemeClr val="accent1"/>
+          </a:effectRef>
+          <a:fontRef idx="minor">
+            <a:schemeClr val="lt1"/>
+          </a:fontRef>
+        </p:style>
+        <p:txBody>
+          <a:bodyPr rtlCol="0" anchor="ctr"/>
+          <a:lstStyle/>
+          <a:p>
+            <a:pPr algn="ctr"/>
+            <a:endParaRPr kumimoji="1" lang="ja-JP" altLang="en-US"/>
+          </a:p>
+        </p:txBody>
+      </p:sp>
+      <p:sp>
+        <p:nvSpPr>
+          <p:cNvPr id="9" name="正方形/長方形 8">
+            <a:extLst>
+              <a:ext uri="{FF2B5EF4-FFF2-40B4-BE49-F238E27FC236}">
+                <a16:creationId xmlns:a16="http://schemas.microsoft.com/office/drawing/2014/main" id="{E8D068BB-7649-4787-A9A5-5BFEC622B502}"/>
+              </a:ext>
+            </a:extLst>
+          </p:cNvPr>
+          <p:cNvSpPr/>
+          <p:nvPr/>
+        </p:nvSpPr>
+        <p:spPr>
+          <a:xfrm>
+            <a:off x="6629675" y="3429000"/>
+            <a:ext cx="1998133" cy="2346887"/>
+          </a:xfrm>
+          <a:prstGeom prst="rect">
+            <a:avLst/>
+          </a:prstGeom>
+        </p:spPr>
+        <p:style>
+          <a:lnRef idx="2">
+            <a:schemeClr val="accent6">
+              <a:shade val="50000"/>
+            </a:schemeClr>
+          </a:lnRef>
+          <a:fillRef idx="1">
+            <a:schemeClr val="accent6"/>
+          </a:fillRef>
+          <a:effectRef idx="0">
+            <a:schemeClr val="accent6"/>
+          </a:effectRef>
+          <a:fontRef idx="minor">
+            <a:schemeClr val="lt1"/>
+          </a:fontRef>
+        </p:style>
+        <p:txBody>
+          <a:bodyPr rtlCol="0" anchor="ctr"/>
+          <a:lstStyle/>
+          <a:p>
+            <a:pPr algn="ctr"/>
+            <a:endParaRPr kumimoji="1" lang="ja-JP" altLang="en-US"/>
+          </a:p>
+        </p:txBody>
+      </p:sp>
+      <p:sp>
+        <p:nvSpPr>
+          <p:cNvPr id="10" name="テキスト ボックス 9">
+            <a:extLst>
+              <a:ext uri="{FF2B5EF4-FFF2-40B4-BE49-F238E27FC236}">
+                <a16:creationId xmlns:a16="http://schemas.microsoft.com/office/drawing/2014/main" id="{F466A805-61B0-489C-97CB-56130C0754D1}"/>
+              </a:ext>
+            </a:extLst>
+          </p:cNvPr>
+          <p:cNvSpPr txBox="1"/>
+          <p:nvPr/>
+        </p:nvSpPr>
+        <p:spPr>
+          <a:xfrm>
+            <a:off x="7126039" y="2950746"/>
+            <a:ext cx="1005403" cy="338554"/>
+          </a:xfrm>
+          <a:prstGeom prst="rect">
+            <a:avLst/>
+          </a:prstGeom>
+          <a:noFill/>
+        </p:spPr>
+        <p:txBody>
+          <a:bodyPr wrap="none" rtlCol="0">
+            <a:spAutoFit/>
+          </a:bodyPr>
+          <a:lstStyle/>
+          <a:p>
+            <a:r>
+              <a:rPr kumimoji="1" lang="ja-JP" altLang="en-US" sz="1600" b="1" dirty="0">
+                <a:solidFill>
+                  <a:srgbClr val="00B050"/>
+                </a:solidFill>
+              </a:rPr>
+              <a:t>サーバー</a:t>
+            </a:r>
+            <a:endParaRPr lang="en-US" altLang="ja-JP" sz="1600" b="1" dirty="0">
+              <a:solidFill>
+                <a:srgbClr val="00B050"/>
+              </a:solidFill>
+            </a:endParaRPr>
+          </a:p>
+        </p:txBody>
+      </p:sp>
+      <p:sp>
+        <p:nvSpPr>
+          <p:cNvPr id="11" name="正方形/長方形 10">
+            <a:extLst>
+              <a:ext uri="{FF2B5EF4-FFF2-40B4-BE49-F238E27FC236}">
+                <a16:creationId xmlns:a16="http://schemas.microsoft.com/office/drawing/2014/main" id="{8EDB46D4-8A6C-4BB5-8134-ACEBA23380BB}"/>
+              </a:ext>
+            </a:extLst>
+          </p:cNvPr>
+          <p:cNvSpPr/>
+          <p:nvPr/>
+        </p:nvSpPr>
+        <p:spPr>
+          <a:xfrm>
+            <a:off x="7039114" y="3707701"/>
+            <a:ext cx="1422401" cy="1721052"/>
+          </a:xfrm>
+          <a:prstGeom prst="rect">
+            <a:avLst/>
+          </a:prstGeom>
+        </p:spPr>
+        <p:style>
+          <a:lnRef idx="2">
+            <a:schemeClr val="accent2"/>
+          </a:lnRef>
+          <a:fillRef idx="1">
+            <a:schemeClr val="lt1"/>
+          </a:fillRef>
+          <a:effectRef idx="0">
+            <a:schemeClr val="accent2"/>
+          </a:effectRef>
+          <a:fontRef idx="minor">
+            <a:schemeClr val="dk1"/>
+          </a:fontRef>
+        </p:style>
+        <p:txBody>
+          <a:bodyPr rtlCol="0" anchor="ctr"/>
+          <a:lstStyle/>
+          <a:p>
+            <a:pPr algn="ctr"/>
+            <a:r>
+              <a:rPr kumimoji="1" lang="ja-JP" altLang="en-US" sz="1200" b="1" dirty="0"/>
+              <a:t>全員に</a:t>
+            </a:r>
+            <a:r>
+              <a:rPr lang="ja-JP" altLang="en-US" sz="1200" b="1" dirty="0"/>
+              <a:t>通達</a:t>
+            </a:r>
+            <a:endParaRPr kumimoji="1" lang="en-US" altLang="ja-JP" sz="1200" b="1" dirty="0"/>
+          </a:p>
+        </p:txBody>
+      </p:sp>
+      <p:sp>
+        <p:nvSpPr>
+          <p:cNvPr id="15" name="正方形/長方形 14">
+            <a:extLst>
+              <a:ext uri="{FF2B5EF4-FFF2-40B4-BE49-F238E27FC236}">
+                <a16:creationId xmlns:a16="http://schemas.microsoft.com/office/drawing/2014/main" id="{AB6CB4A6-511D-43AA-9BAC-3A5204951856}"/>
+              </a:ext>
+            </a:extLst>
+          </p:cNvPr>
+          <p:cNvSpPr/>
+          <p:nvPr/>
+        </p:nvSpPr>
+        <p:spPr>
+          <a:xfrm>
+            <a:off x="9761923" y="2814900"/>
+            <a:ext cx="487885" cy="631042"/>
+          </a:xfrm>
+          <a:prstGeom prst="rect">
+            <a:avLst/>
+          </a:prstGeom>
+        </p:spPr>
+        <p:style>
+          <a:lnRef idx="2">
+            <a:schemeClr val="accent1">
+              <a:shade val="50000"/>
+            </a:schemeClr>
+          </a:lnRef>
+          <a:fillRef idx="1">
+            <a:schemeClr val="accent1"/>
+          </a:fillRef>
+          <a:effectRef idx="0">
+            <a:schemeClr val="accent1"/>
+          </a:effectRef>
+          <a:fontRef idx="minor">
+            <a:schemeClr val="lt1"/>
+          </a:fontRef>
+        </p:style>
+        <p:txBody>
+          <a:bodyPr rtlCol="0" anchor="ctr"/>
+          <a:lstStyle/>
+          <a:p>
+            <a:pPr algn="ctr"/>
+            <a:endParaRPr kumimoji="1" lang="ja-JP" altLang="en-US"/>
+          </a:p>
+        </p:txBody>
+      </p:sp>
+      <p:sp>
+        <p:nvSpPr>
+          <p:cNvPr id="16" name="テキスト ボックス 15">
+            <a:extLst>
+              <a:ext uri="{FF2B5EF4-FFF2-40B4-BE49-F238E27FC236}">
+                <a16:creationId xmlns:a16="http://schemas.microsoft.com/office/drawing/2014/main" id="{3DE3DFD3-A347-45FD-B14B-631E02C069EA}"/>
+              </a:ext>
+            </a:extLst>
+          </p:cNvPr>
+          <p:cNvSpPr txBox="1"/>
+          <p:nvPr/>
+        </p:nvSpPr>
+        <p:spPr>
+          <a:xfrm>
+            <a:off x="9215655" y="2459096"/>
+            <a:ext cx="1561646" cy="338554"/>
+          </a:xfrm>
+          <a:prstGeom prst="rect">
+            <a:avLst/>
+          </a:prstGeom>
+          <a:noFill/>
+        </p:spPr>
+        <p:txBody>
+          <a:bodyPr wrap="none" rtlCol="0">
+            <a:spAutoFit/>
+          </a:bodyPr>
+          <a:lstStyle/>
+          <a:p>
+            <a:r>
+              <a:rPr kumimoji="1" lang="ja-JP" altLang="en-US" sz="1600" b="1" dirty="0">
+                <a:solidFill>
+                  <a:srgbClr val="0070C0"/>
+                </a:solidFill>
+              </a:rPr>
+              <a:t>クライアント</a:t>
+            </a:r>
+            <a:r>
+              <a:rPr kumimoji="1" lang="en-US" altLang="ja-JP" sz="1600" b="1" dirty="0">
+                <a:solidFill>
+                  <a:srgbClr val="0070C0"/>
+                </a:solidFill>
+              </a:rPr>
+              <a:t>B</a:t>
+            </a:r>
+          </a:p>
+        </p:txBody>
+      </p:sp>
+      <p:sp>
+        <p:nvSpPr>
+          <p:cNvPr id="18" name="正方形/長方形 17">
+            <a:extLst>
+              <a:ext uri="{FF2B5EF4-FFF2-40B4-BE49-F238E27FC236}">
+                <a16:creationId xmlns:a16="http://schemas.microsoft.com/office/drawing/2014/main" id="{724CD89E-1865-42A2-B8E4-81111E0C068C}"/>
+              </a:ext>
+            </a:extLst>
+          </p:cNvPr>
+          <p:cNvSpPr/>
+          <p:nvPr/>
+        </p:nvSpPr>
+        <p:spPr>
+          <a:xfrm>
+            <a:off x="9748636" y="4180332"/>
+            <a:ext cx="487885" cy="631042"/>
+          </a:xfrm>
+          <a:prstGeom prst="rect">
+            <a:avLst/>
+          </a:prstGeom>
+        </p:spPr>
+        <p:style>
+          <a:lnRef idx="2">
+            <a:schemeClr val="accent1">
+              <a:shade val="50000"/>
+            </a:schemeClr>
+          </a:lnRef>
+          <a:fillRef idx="1">
+            <a:schemeClr val="accent1"/>
+          </a:fillRef>
+          <a:effectRef idx="0">
+            <a:schemeClr val="accent1"/>
+          </a:effectRef>
+          <a:fontRef idx="minor">
+            <a:schemeClr val="lt1"/>
+          </a:fontRef>
+        </p:style>
+        <p:txBody>
+          <a:bodyPr rtlCol="0" anchor="ctr"/>
+          <a:lstStyle/>
+          <a:p>
+            <a:pPr algn="ctr"/>
+            <a:endParaRPr kumimoji="1" lang="ja-JP" altLang="en-US"/>
+          </a:p>
+        </p:txBody>
+      </p:sp>
+      <p:sp>
+        <p:nvSpPr>
+          <p:cNvPr id="19" name="テキスト ボックス 18">
+            <a:extLst>
+              <a:ext uri="{FF2B5EF4-FFF2-40B4-BE49-F238E27FC236}">
+                <a16:creationId xmlns:a16="http://schemas.microsoft.com/office/drawing/2014/main" id="{B5A4EE89-4B86-4184-9727-6B26B7A91B2C}"/>
+              </a:ext>
+            </a:extLst>
+          </p:cNvPr>
+          <p:cNvSpPr txBox="1"/>
+          <p:nvPr/>
+        </p:nvSpPr>
+        <p:spPr>
+          <a:xfrm>
+            <a:off x="9202368" y="3824528"/>
+            <a:ext cx="1561646" cy="338554"/>
+          </a:xfrm>
+          <a:prstGeom prst="rect">
+            <a:avLst/>
+          </a:prstGeom>
+          <a:noFill/>
+        </p:spPr>
+        <p:txBody>
+          <a:bodyPr wrap="none" rtlCol="0">
+            <a:spAutoFit/>
+          </a:bodyPr>
+          <a:lstStyle/>
+          <a:p>
+            <a:r>
+              <a:rPr kumimoji="1" lang="ja-JP" altLang="en-US" sz="1600" b="1" dirty="0">
+                <a:solidFill>
+                  <a:srgbClr val="0070C0"/>
+                </a:solidFill>
+              </a:rPr>
+              <a:t>クライアント</a:t>
+            </a:r>
+            <a:r>
+              <a:rPr kumimoji="1" lang="en-US" altLang="ja-JP" sz="1600" b="1" dirty="0">
+                <a:solidFill>
+                  <a:srgbClr val="0070C0"/>
+                </a:solidFill>
+              </a:rPr>
+              <a:t>C</a:t>
+            </a:r>
+          </a:p>
+        </p:txBody>
+      </p:sp>
+      <p:sp>
+        <p:nvSpPr>
+          <p:cNvPr id="20" name="正方形/長方形 19">
+            <a:extLst>
+              <a:ext uri="{FF2B5EF4-FFF2-40B4-BE49-F238E27FC236}">
+                <a16:creationId xmlns:a16="http://schemas.microsoft.com/office/drawing/2014/main" id="{753E7D7B-1304-45AC-8A9E-1F092F8E3686}"/>
+              </a:ext>
+            </a:extLst>
+          </p:cNvPr>
+          <p:cNvSpPr/>
+          <p:nvPr/>
+        </p:nvSpPr>
+        <p:spPr>
+          <a:xfrm>
+            <a:off x="9798713" y="5619344"/>
+            <a:ext cx="487885" cy="631042"/>
+          </a:xfrm>
+          <a:prstGeom prst="rect">
+            <a:avLst/>
+          </a:prstGeom>
+        </p:spPr>
+        <p:style>
+          <a:lnRef idx="2">
+            <a:schemeClr val="accent1">
+              <a:shade val="50000"/>
+            </a:schemeClr>
+          </a:lnRef>
+          <a:fillRef idx="1">
+            <a:schemeClr val="accent1"/>
+          </a:fillRef>
+          <a:effectRef idx="0">
+            <a:schemeClr val="accent1"/>
+          </a:effectRef>
+          <a:fontRef idx="minor">
+            <a:schemeClr val="lt1"/>
+          </a:fontRef>
+        </p:style>
+        <p:txBody>
+          <a:bodyPr rtlCol="0" anchor="ctr"/>
+          <a:lstStyle/>
+          <a:p>
+            <a:pPr algn="ctr"/>
+            <a:endParaRPr kumimoji="1" lang="ja-JP" altLang="en-US"/>
+          </a:p>
+        </p:txBody>
+      </p:sp>
+      <p:sp>
+        <p:nvSpPr>
+          <p:cNvPr id="21" name="テキスト ボックス 20">
+            <a:extLst>
+              <a:ext uri="{FF2B5EF4-FFF2-40B4-BE49-F238E27FC236}">
+                <a16:creationId xmlns:a16="http://schemas.microsoft.com/office/drawing/2014/main" id="{E0EC8CE6-8DDB-4D41-BA72-D603110156A7}"/>
+              </a:ext>
+            </a:extLst>
+          </p:cNvPr>
+          <p:cNvSpPr txBox="1"/>
+          <p:nvPr/>
+        </p:nvSpPr>
+        <p:spPr>
+          <a:xfrm>
+            <a:off x="9252445" y="5263540"/>
+            <a:ext cx="1561646" cy="338554"/>
+          </a:xfrm>
+          <a:prstGeom prst="rect">
+            <a:avLst/>
+          </a:prstGeom>
+          <a:noFill/>
+        </p:spPr>
+        <p:txBody>
+          <a:bodyPr wrap="none" rtlCol="0">
+            <a:spAutoFit/>
+          </a:bodyPr>
+          <a:lstStyle/>
+          <a:p>
+            <a:r>
+              <a:rPr kumimoji="1" lang="ja-JP" altLang="en-US" sz="1600" b="1" dirty="0">
+                <a:solidFill>
+                  <a:srgbClr val="0070C0"/>
+                </a:solidFill>
+              </a:rPr>
+              <a:t>クライアント</a:t>
+            </a:r>
+            <a:r>
+              <a:rPr kumimoji="1" lang="en-US" altLang="ja-JP" sz="1600" b="1" dirty="0">
+                <a:solidFill>
+                  <a:srgbClr val="0070C0"/>
+                </a:solidFill>
+              </a:rPr>
+              <a:t>D</a:t>
+            </a:r>
+          </a:p>
+        </p:txBody>
+      </p:sp>
+      <p:sp>
+        <p:nvSpPr>
+          <p:cNvPr id="2" name="矢印: 右 1">
+            <a:extLst>
+              <a:ext uri="{FF2B5EF4-FFF2-40B4-BE49-F238E27FC236}">
+                <a16:creationId xmlns:a16="http://schemas.microsoft.com/office/drawing/2014/main" id="{63F62A76-7ED2-4B86-92B6-CFFFEC66F2F7}"/>
+              </a:ext>
+            </a:extLst>
+          </p:cNvPr>
+          <p:cNvSpPr/>
+          <p:nvPr/>
+        </p:nvSpPr>
+        <p:spPr>
+          <a:xfrm rot="20278838">
+            <a:off x="8328858" y="3277600"/>
+            <a:ext cx="1474899" cy="355804"/>
+          </a:xfrm>
+          <a:prstGeom prst="rightArrow">
+            <a:avLst/>
+          </a:prstGeom>
+          <a:solidFill>
+            <a:schemeClr val="accent6">
+              <a:lumMod val="75000"/>
+            </a:schemeClr>
+          </a:solidFill>
+        </p:spPr>
+        <p:style>
+          <a:lnRef idx="2">
+            <a:schemeClr val="accent6">
+              <a:shade val="50000"/>
+            </a:schemeClr>
+          </a:lnRef>
+          <a:fillRef idx="1">
+            <a:schemeClr val="accent6"/>
+          </a:fillRef>
+          <a:effectRef idx="0">
+            <a:schemeClr val="accent6"/>
+          </a:effectRef>
+          <a:fontRef idx="minor">
+            <a:schemeClr val="lt1"/>
+          </a:fontRef>
+        </p:style>
+        <p:txBody>
+          <a:bodyPr rtlCol="0" anchor="ctr"/>
+          <a:lstStyle/>
+          <a:p>
+            <a:pPr algn="ctr"/>
+            <a:r>
+              <a:rPr kumimoji="1" lang="en-US" altLang="ja-JP" b="1" dirty="0"/>
+              <a:t>ID</a:t>
+            </a:r>
+            <a:endParaRPr kumimoji="1" lang="ja-JP" altLang="en-US" b="1" dirty="0"/>
+          </a:p>
+        </p:txBody>
+      </p:sp>
+      <p:sp>
+        <p:nvSpPr>
+          <p:cNvPr id="22" name="矢印: 右 21">
+            <a:extLst>
+              <a:ext uri="{FF2B5EF4-FFF2-40B4-BE49-F238E27FC236}">
+                <a16:creationId xmlns:a16="http://schemas.microsoft.com/office/drawing/2014/main" id="{0400CC8E-79FC-4286-9EBC-55F3A12F0537}"/>
+              </a:ext>
+            </a:extLst>
+          </p:cNvPr>
+          <p:cNvSpPr/>
+          <p:nvPr/>
+        </p:nvSpPr>
+        <p:spPr>
+          <a:xfrm>
+            <a:off x="8464919" y="4351544"/>
+            <a:ext cx="1283718" cy="355804"/>
+          </a:xfrm>
+          <a:prstGeom prst="rightArrow">
+            <a:avLst/>
+          </a:prstGeom>
+          <a:solidFill>
+            <a:schemeClr val="accent6">
+              <a:lumMod val="75000"/>
+            </a:schemeClr>
+          </a:solidFill>
+        </p:spPr>
+        <p:style>
+          <a:lnRef idx="2">
+            <a:schemeClr val="accent6">
+              <a:shade val="50000"/>
+            </a:schemeClr>
+          </a:lnRef>
+          <a:fillRef idx="1">
+            <a:schemeClr val="accent6"/>
+          </a:fillRef>
+          <a:effectRef idx="0">
+            <a:schemeClr val="accent6"/>
+          </a:effectRef>
+          <a:fontRef idx="minor">
+            <a:schemeClr val="lt1"/>
+          </a:fontRef>
+        </p:style>
+        <p:txBody>
+          <a:bodyPr rtlCol="0" anchor="ctr"/>
+          <a:lstStyle/>
+          <a:p>
+            <a:pPr algn="ctr"/>
+            <a:r>
+              <a:rPr kumimoji="1" lang="en-US" altLang="ja-JP" b="1" dirty="0"/>
+              <a:t>ID</a:t>
+            </a:r>
+            <a:endParaRPr kumimoji="1" lang="ja-JP" altLang="en-US" b="1" dirty="0"/>
+          </a:p>
+        </p:txBody>
+      </p:sp>
+      <p:sp>
+        <p:nvSpPr>
+          <p:cNvPr id="23" name="矢印: 右 22">
+            <a:extLst>
+              <a:ext uri="{FF2B5EF4-FFF2-40B4-BE49-F238E27FC236}">
+                <a16:creationId xmlns:a16="http://schemas.microsoft.com/office/drawing/2014/main" id="{5DD5A8FA-2252-451B-AD48-C7F95B6CE991}"/>
+              </a:ext>
+            </a:extLst>
+          </p:cNvPr>
+          <p:cNvSpPr/>
+          <p:nvPr/>
+        </p:nvSpPr>
+        <p:spPr>
+          <a:xfrm rot="1521312">
+            <a:off x="8417841" y="5350703"/>
+            <a:ext cx="1420873" cy="355804"/>
+          </a:xfrm>
+          <a:prstGeom prst="rightArrow">
+            <a:avLst/>
+          </a:prstGeom>
+          <a:solidFill>
+            <a:schemeClr val="accent6">
+              <a:lumMod val="75000"/>
+            </a:schemeClr>
+          </a:solidFill>
+        </p:spPr>
+        <p:style>
+          <a:lnRef idx="2">
+            <a:schemeClr val="accent6">
+              <a:shade val="50000"/>
+            </a:schemeClr>
+          </a:lnRef>
+          <a:fillRef idx="1">
+            <a:schemeClr val="accent6"/>
+          </a:fillRef>
+          <a:effectRef idx="0">
+            <a:schemeClr val="accent6"/>
+          </a:effectRef>
+          <a:fontRef idx="minor">
+            <a:schemeClr val="lt1"/>
+          </a:fontRef>
+        </p:style>
+        <p:txBody>
+          <a:bodyPr rtlCol="0" anchor="ctr"/>
+          <a:lstStyle/>
+          <a:p>
+            <a:pPr algn="ctr"/>
+            <a:r>
+              <a:rPr kumimoji="1" lang="en-US" altLang="ja-JP" b="1" dirty="0"/>
+              <a:t>ID</a:t>
+            </a:r>
+            <a:endParaRPr kumimoji="1" lang="ja-JP" altLang="en-US" b="1" dirty="0"/>
+          </a:p>
+        </p:txBody>
+      </p:sp>
+      <p:sp>
+        <p:nvSpPr>
+          <p:cNvPr id="24" name="矢印: 右 23">
+            <a:extLst>
+              <a:ext uri="{FF2B5EF4-FFF2-40B4-BE49-F238E27FC236}">
+                <a16:creationId xmlns:a16="http://schemas.microsoft.com/office/drawing/2014/main" id="{6323AB7E-EAF1-4154-B21F-5C7B268EF060}"/>
+              </a:ext>
+            </a:extLst>
+          </p:cNvPr>
+          <p:cNvSpPr/>
+          <p:nvPr/>
+        </p:nvSpPr>
+        <p:spPr>
+          <a:xfrm>
+            <a:off x="2565675" y="4339627"/>
+            <a:ext cx="4473439" cy="457200"/>
+          </a:xfrm>
+          <a:prstGeom prst="rightArrow">
+            <a:avLst/>
+          </a:prstGeom>
+        </p:spPr>
+        <p:style>
+          <a:lnRef idx="2">
+            <a:schemeClr val="accent5">
+              <a:shade val="50000"/>
+            </a:schemeClr>
+          </a:lnRef>
+          <a:fillRef idx="1">
+            <a:schemeClr val="accent5"/>
+          </a:fillRef>
+          <a:effectRef idx="0">
+            <a:schemeClr val="accent5"/>
+          </a:effectRef>
+          <a:fontRef idx="minor">
+            <a:schemeClr val="lt1"/>
+          </a:fontRef>
+        </p:style>
+        <p:txBody>
+          <a:bodyPr rtlCol="0" anchor="ctr"/>
+          <a:lstStyle/>
+          <a:p>
+            <a:pPr algn="ctr"/>
+            <a:r>
+              <a:rPr kumimoji="1" lang="ja-JP" altLang="en-US" b="1" dirty="0"/>
+              <a:t>切断</a:t>
+            </a:r>
+          </a:p>
+        </p:txBody>
+      </p:sp>
+      <p:sp>
+        <p:nvSpPr>
+          <p:cNvPr id="25" name="正方形/長方形 24">
+            <a:extLst>
+              <a:ext uri="{FF2B5EF4-FFF2-40B4-BE49-F238E27FC236}">
+                <a16:creationId xmlns:a16="http://schemas.microsoft.com/office/drawing/2014/main" id="{C9FC12E5-0FAA-4FDE-A72D-370003EF6F43}"/>
+              </a:ext>
+            </a:extLst>
+          </p:cNvPr>
+          <p:cNvSpPr/>
+          <p:nvPr/>
+        </p:nvSpPr>
+        <p:spPr>
+          <a:xfrm>
+            <a:off x="9961522" y="2939078"/>
+            <a:ext cx="1422401" cy="382686"/>
+          </a:xfrm>
+          <a:prstGeom prst="rect">
+            <a:avLst/>
+          </a:prstGeom>
+        </p:spPr>
+        <p:style>
+          <a:lnRef idx="2">
+            <a:schemeClr val="accent2"/>
+          </a:lnRef>
+          <a:fillRef idx="1">
+            <a:schemeClr val="lt1"/>
+          </a:fillRef>
+          <a:effectRef idx="0">
+            <a:schemeClr val="accent2"/>
+          </a:effectRef>
+          <a:fontRef idx="minor">
+            <a:schemeClr val="dk1"/>
+          </a:fontRef>
+        </p:style>
+        <p:txBody>
+          <a:bodyPr rtlCol="0" anchor="ctr"/>
+          <a:lstStyle/>
+          <a:p>
+            <a:pPr algn="ctr"/>
+            <a:r>
+              <a:rPr kumimoji="1" lang="ja-JP" altLang="en-US" sz="900" b="1" dirty="0"/>
+              <a:t>切断したプレイヤーをログアウト</a:t>
+            </a:r>
+            <a:endParaRPr kumimoji="1" lang="en-US" altLang="ja-JP" sz="900" b="1" dirty="0"/>
+          </a:p>
+        </p:txBody>
+      </p:sp>
+      <p:sp>
+        <p:nvSpPr>
+          <p:cNvPr id="26" name="正方形/長方形 25">
+            <a:extLst>
+              <a:ext uri="{FF2B5EF4-FFF2-40B4-BE49-F238E27FC236}">
+                <a16:creationId xmlns:a16="http://schemas.microsoft.com/office/drawing/2014/main" id="{BDADD459-95F3-4ADC-9171-4F79720C7700}"/>
+              </a:ext>
+            </a:extLst>
+          </p:cNvPr>
+          <p:cNvSpPr/>
+          <p:nvPr/>
+        </p:nvSpPr>
+        <p:spPr>
+          <a:xfrm>
+            <a:off x="9934948" y="4283160"/>
+            <a:ext cx="1422401" cy="382686"/>
+          </a:xfrm>
+          <a:prstGeom prst="rect">
+            <a:avLst/>
+          </a:prstGeom>
+        </p:spPr>
+        <p:style>
+          <a:lnRef idx="2">
+            <a:schemeClr val="accent2"/>
+          </a:lnRef>
+          <a:fillRef idx="1">
+            <a:schemeClr val="lt1"/>
+          </a:fillRef>
+          <a:effectRef idx="0">
+            <a:schemeClr val="accent2"/>
+          </a:effectRef>
+          <a:fontRef idx="minor">
+            <a:schemeClr val="dk1"/>
+          </a:fontRef>
+        </p:style>
+        <p:txBody>
+          <a:bodyPr rtlCol="0" anchor="ctr"/>
+          <a:lstStyle/>
+          <a:p>
+            <a:pPr algn="ctr"/>
+            <a:r>
+              <a:rPr kumimoji="1" lang="ja-JP" altLang="en-US" sz="900" b="1" dirty="0"/>
+              <a:t>切断したプレイヤーをログアウト</a:t>
+            </a:r>
+            <a:endParaRPr kumimoji="1" lang="en-US" altLang="ja-JP" sz="900" b="1" dirty="0"/>
+          </a:p>
+        </p:txBody>
+      </p:sp>
+      <p:sp>
+        <p:nvSpPr>
+          <p:cNvPr id="27" name="正方形/長方形 26">
+            <a:extLst>
+              <a:ext uri="{FF2B5EF4-FFF2-40B4-BE49-F238E27FC236}">
+                <a16:creationId xmlns:a16="http://schemas.microsoft.com/office/drawing/2014/main" id="{C0E9E798-597B-4147-9FED-9E099BA3AE30}"/>
+              </a:ext>
+            </a:extLst>
+          </p:cNvPr>
+          <p:cNvSpPr/>
+          <p:nvPr/>
+        </p:nvSpPr>
+        <p:spPr>
+          <a:xfrm>
+            <a:off x="10033268" y="5772770"/>
+            <a:ext cx="1422401" cy="382686"/>
+          </a:xfrm>
+          <a:prstGeom prst="rect">
+            <a:avLst/>
+          </a:prstGeom>
+        </p:spPr>
+        <p:style>
+          <a:lnRef idx="2">
+            <a:schemeClr val="accent2"/>
+          </a:lnRef>
+          <a:fillRef idx="1">
+            <a:schemeClr val="lt1"/>
+          </a:fillRef>
+          <a:effectRef idx="0">
+            <a:schemeClr val="accent2"/>
+          </a:effectRef>
+          <a:fontRef idx="minor">
+            <a:schemeClr val="dk1"/>
+          </a:fontRef>
+        </p:style>
+        <p:txBody>
+          <a:bodyPr rtlCol="0" anchor="ctr"/>
+          <a:lstStyle/>
+          <a:p>
+            <a:pPr algn="ctr"/>
+            <a:r>
+              <a:rPr kumimoji="1" lang="ja-JP" altLang="en-US" sz="900" b="1" dirty="0"/>
+              <a:t>切断したプレイヤーをログアウト</a:t>
+            </a:r>
+            <a:endParaRPr kumimoji="1" lang="en-US" altLang="ja-JP" sz="900" b="1" dirty="0"/>
+          </a:p>
+        </p:txBody>
+      </p:sp>
+    </p:spTree>
+    <p:extLst>
+      <p:ext uri="{BB962C8B-B14F-4D97-AF65-F5344CB8AC3E}">
+        <p14:creationId xmlns:p14="http://schemas.microsoft.com/office/powerpoint/2010/main" val="27739162"/>
       </p:ext>
     </p:extLst>
   </p:cSld>
@@ -4643,7 +6144,7 @@
         <p:spPr>
           <a:xfrm>
             <a:off x="567542" y="491954"/>
-            <a:ext cx="4346062" cy="584775"/>
+            <a:ext cx="1826141" cy="584775"/>
           </a:xfrm>
           <a:prstGeom prst="rect">
             <a:avLst/>
@@ -4657,12 +6158,8 @@
           <a:lstStyle/>
           <a:p>
             <a:r>
-              <a:rPr kumimoji="1" lang="en-US" altLang="ja-JP" sz="3200" b="1" u="sng" dirty="0"/>
-              <a:t>Network</a:t>
-            </a:r>
-            <a:r>
               <a:rPr kumimoji="1" lang="ja-JP" altLang="en-US" sz="3200" b="1" u="sng" dirty="0"/>
-              <a:t>オブジェクト</a:t>
+              <a:t>ログイン</a:t>
             </a:r>
           </a:p>
         </p:txBody>
@@ -4682,7 +6179,7 @@
         <p:spPr>
           <a:xfrm>
             <a:off x="567542" y="1216429"/>
-            <a:ext cx="9278502" cy="830997"/>
+            <a:ext cx="8494633" cy="830997"/>
           </a:xfrm>
           <a:prstGeom prst="rect">
             <a:avLst/>
@@ -4696,39 +6193,31 @@
           <a:lstStyle/>
           <a:p>
             <a:r>
-              <a:rPr lang="en-US" altLang="ja-JP" sz="2400" b="1" dirty="0" err="1">
+              <a:rPr kumimoji="1" lang="en-US" altLang="ja-JP" sz="2400" b="1" dirty="0">
                 <a:solidFill>
                   <a:srgbClr val="00B050"/>
                 </a:solidFill>
               </a:rPr>
-              <a:t>NetworkPlayScene</a:t>
-            </a:r>
-            <a:r>
-              <a:rPr lang="ja-JP" altLang="en-US" sz="2400" dirty="0"/>
-              <a:t>から作成します。</a:t>
-            </a:r>
-            <a:endParaRPr lang="en-US" altLang="ja-JP" sz="2400" dirty="0"/>
-          </a:p>
-          <a:p>
-            <a:r>
-              <a:rPr lang="en-US" altLang="ja-JP" sz="2400" dirty="0"/>
-              <a:t>Scene</a:t>
-            </a:r>
-            <a:r>
-              <a:rPr lang="ja-JP" altLang="en-US" sz="2400" dirty="0"/>
-              <a:t>フォルダに</a:t>
-            </a:r>
-            <a:r>
-              <a:rPr lang="en-US" altLang="ja-JP" sz="2400" b="1" dirty="0">
+              <a:t>Server</a:t>
+            </a:r>
+            <a:r>
+              <a:rPr kumimoji="1" lang="ja-JP" altLang="en-US" sz="2400" b="1" dirty="0">
                 <a:solidFill>
-                  <a:srgbClr val="FF0000"/>
+                  <a:srgbClr val="00B050"/>
                 </a:solidFill>
               </a:rPr>
-              <a:t>NetworkPlayScene.cpp/.h</a:t>
-            </a:r>
+              <a:t>プロジェクト</a:t>
+            </a:r>
+            <a:r>
+              <a:rPr kumimoji="1" lang="ja-JP" altLang="en-US" sz="2400" dirty="0"/>
+              <a:t>を開きましょう</a:t>
+            </a:r>
+            <a:endParaRPr kumimoji="1" lang="en-US" altLang="ja-JP" sz="2400" dirty="0"/>
+          </a:p>
+          <a:p>
             <a:r>
               <a:rPr lang="ja-JP" altLang="en-US" sz="2400" dirty="0"/>
-              <a:t>を追加しましょう。</a:t>
+              <a:t>クライアントからの接続処理はすでにできているはずです。</a:t>
             </a:r>
             <a:endParaRPr lang="en-US" altLang="ja-JP" sz="2400" dirty="0"/>
           </a:p>
@@ -4739,7 +6228,7 @@
           <p:cNvPr id="3" name="図 2">
             <a:extLst>
               <a:ext uri="{FF2B5EF4-FFF2-40B4-BE49-F238E27FC236}">
-                <a16:creationId xmlns:a16="http://schemas.microsoft.com/office/drawing/2014/main" id="{5AECC083-F0A6-423C-8456-89765BADC3F8}"/>
+                <a16:creationId xmlns:a16="http://schemas.microsoft.com/office/drawing/2014/main" id="{B6BF5E8C-F5CC-46FC-BFD0-A2293862BD3A}"/>
               </a:ext>
             </a:extLst>
           </p:cNvPr>
@@ -4757,7 +6246,7 @@
         <p:spPr>
           <a:xfrm>
             <a:off x="567542" y="2187126"/>
-            <a:ext cx="4106553" cy="2918274"/>
+            <a:ext cx="7899125" cy="4245780"/>
           </a:xfrm>
           <a:prstGeom prst="rect">
             <a:avLst/>
@@ -4767,7 +6256,7 @@
     </p:spTree>
     <p:extLst>
       <p:ext uri="{BB962C8B-B14F-4D97-AF65-F5344CB8AC3E}">
-        <p14:creationId xmlns:p14="http://schemas.microsoft.com/office/powerpoint/2010/main" val="1140045622"/>
+        <p14:creationId xmlns:p14="http://schemas.microsoft.com/office/powerpoint/2010/main" val="998987981"/>
       </p:ext>
     </p:extLst>
   </p:cSld>
@@ -4809,7 +6298,7 @@
         <p:spPr>
           <a:xfrm>
             <a:off x="567542" y="491954"/>
-            <a:ext cx="4346062" cy="584775"/>
+            <a:ext cx="1826141" cy="584775"/>
           </a:xfrm>
           <a:prstGeom prst="rect">
             <a:avLst/>
@@ -4823,12 +6312,8 @@
           <a:lstStyle/>
           <a:p>
             <a:r>
-              <a:rPr kumimoji="1" lang="en-US" altLang="ja-JP" sz="3200" b="1" u="sng" dirty="0"/>
-              <a:t>Network</a:t>
-            </a:r>
-            <a:r>
               <a:rPr kumimoji="1" lang="ja-JP" altLang="en-US" sz="3200" b="1" u="sng" dirty="0"/>
-              <a:t>オブジェクト</a:t>
+              <a:t>ログイン</a:t>
             </a:r>
           </a:p>
         </p:txBody>
@@ -4848,7 +6333,7 @@
         <p:spPr>
           <a:xfrm>
             <a:off x="567542" y="1216429"/>
-            <a:ext cx="5153975" cy="461665"/>
+            <a:ext cx="5740674" cy="461665"/>
           </a:xfrm>
           <a:prstGeom prst="rect">
             <a:avLst/>
@@ -4862,18 +6347,18 @@
           <a:lstStyle/>
           <a:p>
             <a:r>
-              <a:rPr lang="en-US" altLang="ja-JP" sz="2400" b="1" dirty="0" err="1">
+              <a:rPr kumimoji="1" lang="en-US" altLang="ja-JP" sz="2400" b="1" dirty="0" err="1">
                 <a:solidFill>
                   <a:srgbClr val="FF0000"/>
                 </a:solidFill>
               </a:rPr>
-              <a:t>NetworkPlayScene.h</a:t>
-            </a:r>
-            <a:r>
-              <a:rPr lang="ja-JP" altLang="en-US" sz="2400" dirty="0"/>
-              <a:t>を書きます。</a:t>
-            </a:r>
-            <a:endParaRPr lang="en-US" altLang="ja-JP" sz="2400" dirty="0"/>
+              <a:t>Server.h</a:t>
+            </a:r>
+            <a:r>
+              <a:rPr kumimoji="1" lang="ja-JP" altLang="en-US" sz="2400" dirty="0"/>
+              <a:t>にログイン関数を追加します。</a:t>
+            </a:r>
+            <a:endParaRPr kumimoji="1" lang="en-US" altLang="ja-JP" sz="2400" dirty="0"/>
           </a:p>
         </p:txBody>
       </p:sp>
@@ -4882,7 +6367,7 @@
           <p:cNvPr id="5" name="図 4">
             <a:extLst>
               <a:ext uri="{FF2B5EF4-FFF2-40B4-BE49-F238E27FC236}">
-                <a16:creationId xmlns:a16="http://schemas.microsoft.com/office/drawing/2014/main" id="{5ECCB69E-243C-4871-8F6D-5B7074A75D8F}"/>
+                <a16:creationId xmlns:a16="http://schemas.microsoft.com/office/drawing/2014/main" id="{893B290F-A3DE-4F5B-BD7A-403CC6D0B963}"/>
               </a:ext>
             </a:extLst>
           </p:cNvPr>
@@ -4900,17 +6385,69 @@
         <p:spPr>
           <a:xfrm>
             <a:off x="567542" y="1817794"/>
-            <a:ext cx="4622525" cy="4605624"/>
+            <a:ext cx="7487695" cy="4134427"/>
           </a:xfrm>
           <a:prstGeom prst="rect">
             <a:avLst/>
           </a:prstGeom>
         </p:spPr>
       </p:pic>
+      <p:sp>
+        <p:nvSpPr>
+          <p:cNvPr id="7" name="正方形/長方形 6">
+            <a:extLst>
+              <a:ext uri="{FF2B5EF4-FFF2-40B4-BE49-F238E27FC236}">
+                <a16:creationId xmlns:a16="http://schemas.microsoft.com/office/drawing/2014/main" id="{4E21A433-E769-4258-890A-C22AF5CAB9AC}"/>
+              </a:ext>
+            </a:extLst>
+          </p:cNvPr>
+          <p:cNvSpPr/>
+          <p:nvPr/>
+        </p:nvSpPr>
+        <p:spPr>
+          <a:xfrm>
+            <a:off x="1769533" y="5173133"/>
+            <a:ext cx="6036734" cy="468438"/>
+          </a:xfrm>
+          <a:prstGeom prst="rect">
+            <a:avLst/>
+          </a:prstGeom>
+          <a:noFill/>
+          <a:ln w="38100">
+            <a:solidFill>
+              <a:srgbClr val="FF0000"/>
+            </a:solidFill>
+          </a:ln>
+        </p:spPr>
+        <p:style>
+          <a:lnRef idx="2">
+            <a:schemeClr val="accent1">
+              <a:shade val="50000"/>
+            </a:schemeClr>
+          </a:lnRef>
+          <a:fillRef idx="1">
+            <a:schemeClr val="accent1"/>
+          </a:fillRef>
+          <a:effectRef idx="0">
+            <a:schemeClr val="accent1"/>
+          </a:effectRef>
+          <a:fontRef idx="minor">
+            <a:schemeClr val="lt1"/>
+          </a:fontRef>
+        </p:style>
+        <p:txBody>
+          <a:bodyPr rtlCol="0" anchor="ctr"/>
+          <a:lstStyle/>
+          <a:p>
+            <a:pPr algn="ctr"/>
+            <a:endParaRPr kumimoji="1" lang="ja-JP" altLang="en-US"/>
+          </a:p>
+        </p:txBody>
+      </p:sp>
     </p:spTree>
     <p:extLst>
       <p:ext uri="{BB962C8B-B14F-4D97-AF65-F5344CB8AC3E}">
-        <p14:creationId xmlns:p14="http://schemas.microsoft.com/office/powerpoint/2010/main" val="989472330"/>
+        <p14:creationId xmlns:p14="http://schemas.microsoft.com/office/powerpoint/2010/main" val="1429863374"/>
       </p:ext>
     </p:extLst>
   </p:cSld>
@@ -4952,7 +6489,7 @@
         <p:spPr>
           <a:xfrm>
             <a:off x="567542" y="491954"/>
-            <a:ext cx="4346062" cy="584775"/>
+            <a:ext cx="1826141" cy="584775"/>
           </a:xfrm>
           <a:prstGeom prst="rect">
             <a:avLst/>
@@ -4966,12 +6503,8 @@
           <a:lstStyle/>
           <a:p>
             <a:r>
-              <a:rPr kumimoji="1" lang="en-US" altLang="ja-JP" sz="3200" b="1" u="sng" dirty="0"/>
-              <a:t>Network</a:t>
-            </a:r>
-            <a:r>
               <a:rPr kumimoji="1" lang="ja-JP" altLang="en-US" sz="3200" b="1" u="sng" dirty="0"/>
-              <a:t>オブジェクト</a:t>
+              <a:t>ログイン</a:t>
             </a:r>
           </a:p>
         </p:txBody>
@@ -4991,7 +6524,7 @@
         <p:spPr>
           <a:xfrm>
             <a:off x="567542" y="1216429"/>
-            <a:ext cx="7050328" cy="461665"/>
+            <a:ext cx="10726013" cy="461665"/>
           </a:xfrm>
           <a:prstGeom prst="rect">
             <a:avLst/>
@@ -5005,18 +6538,26 @@
           <a:lstStyle/>
           <a:p>
             <a:r>
-              <a:rPr lang="en-US" altLang="ja-JP" sz="2400" b="1" dirty="0">
+              <a:rPr kumimoji="1" lang="en-US" altLang="ja-JP" sz="2400" b="1" dirty="0">
                 <a:solidFill>
                   <a:srgbClr val="FF0000"/>
                 </a:solidFill>
               </a:rPr>
-              <a:t>NetworkPlayScene.cpp</a:t>
-            </a:r>
-            <a:r>
-              <a:rPr lang="ja-JP" altLang="en-US" sz="2400" dirty="0"/>
-              <a:t>を書きます。（その１）</a:t>
-            </a:r>
-            <a:endParaRPr lang="en-US" altLang="ja-JP" sz="2400" dirty="0"/>
+              <a:t>Server.cpp</a:t>
+            </a:r>
+            <a:r>
+              <a:rPr kumimoji="1" lang="ja-JP" altLang="en-US" sz="2400" dirty="0"/>
+              <a:t>に</a:t>
+            </a:r>
+            <a:r>
+              <a:rPr kumimoji="1" lang="en-US" altLang="ja-JP" sz="2400" dirty="0"/>
+              <a:t>ID</a:t>
+            </a:r>
+            <a:r>
+              <a:rPr kumimoji="1" lang="ja-JP" altLang="en-US" sz="2400" dirty="0"/>
+              <a:t>を生成してクライアントに送る処理を書きます。（その１）</a:t>
+            </a:r>
+            <a:endParaRPr kumimoji="1" lang="en-US" altLang="ja-JP" sz="2400" dirty="0"/>
           </a:p>
         </p:txBody>
       </p:sp>
@@ -5025,7 +6566,7 @@
           <p:cNvPr id="3" name="図 2">
             <a:extLst>
               <a:ext uri="{FF2B5EF4-FFF2-40B4-BE49-F238E27FC236}">
-                <a16:creationId xmlns:a16="http://schemas.microsoft.com/office/drawing/2014/main" id="{9D7B22B4-67FC-48BA-A29D-61E28C92B685}"/>
+                <a16:creationId xmlns:a16="http://schemas.microsoft.com/office/drawing/2014/main" id="{4B6A6543-678E-4884-81B8-728152A497A2}"/>
               </a:ext>
             </a:extLst>
           </p:cNvPr>
@@ -5043,7 +6584,7 @@
         <p:spPr>
           <a:xfrm>
             <a:off x="567542" y="1817794"/>
-            <a:ext cx="5189791" cy="4420685"/>
+            <a:ext cx="8609649" cy="4548252"/>
           </a:xfrm>
           <a:prstGeom prst="rect">
             <a:avLst/>
@@ -5053,7 +6594,7 @@
     </p:spTree>
     <p:extLst>
       <p:ext uri="{BB962C8B-B14F-4D97-AF65-F5344CB8AC3E}">
-        <p14:creationId xmlns:p14="http://schemas.microsoft.com/office/powerpoint/2010/main" val="3190739409"/>
+        <p14:creationId xmlns:p14="http://schemas.microsoft.com/office/powerpoint/2010/main" val="998126773"/>
       </p:ext>
     </p:extLst>
   </p:cSld>
@@ -5095,7 +6636,7 @@
         <p:spPr>
           <a:xfrm>
             <a:off x="567542" y="491954"/>
-            <a:ext cx="4346062" cy="584775"/>
+            <a:ext cx="1826141" cy="584775"/>
           </a:xfrm>
           <a:prstGeom prst="rect">
             <a:avLst/>
@@ -5109,12 +6650,8 @@
           <a:lstStyle/>
           <a:p>
             <a:r>
-              <a:rPr kumimoji="1" lang="en-US" altLang="ja-JP" sz="3200" b="1" u="sng" dirty="0"/>
-              <a:t>Network</a:t>
-            </a:r>
-            <a:r>
               <a:rPr kumimoji="1" lang="ja-JP" altLang="en-US" sz="3200" b="1" u="sng" dirty="0"/>
-              <a:t>オブジェクト</a:t>
+              <a:t>ログイン</a:t>
             </a:r>
           </a:p>
         </p:txBody>
@@ -5134,7 +6671,7 @@
         <p:spPr>
           <a:xfrm>
             <a:off x="567542" y="1216429"/>
-            <a:ext cx="7050328" cy="461665"/>
+            <a:ext cx="10726013" cy="461665"/>
           </a:xfrm>
           <a:prstGeom prst="rect">
             <a:avLst/>
@@ -5148,27 +6685,35 @@
           <a:lstStyle/>
           <a:p>
             <a:r>
-              <a:rPr lang="en-US" altLang="ja-JP" sz="2400" b="1" dirty="0">
+              <a:rPr kumimoji="1" lang="en-US" altLang="ja-JP" sz="2400" b="1" dirty="0">
                 <a:solidFill>
                   <a:srgbClr val="FF0000"/>
                 </a:solidFill>
               </a:rPr>
-              <a:t>NetworkPlayScene.cpp</a:t>
-            </a:r>
-            <a:r>
-              <a:rPr lang="ja-JP" altLang="en-US" sz="2400" dirty="0"/>
-              <a:t>を書きます。（その２）</a:t>
-            </a:r>
-            <a:endParaRPr lang="en-US" altLang="ja-JP" sz="2400" dirty="0"/>
+              <a:t>Server.cpp</a:t>
+            </a:r>
+            <a:r>
+              <a:rPr kumimoji="1" lang="ja-JP" altLang="en-US" sz="2400" dirty="0"/>
+              <a:t>に</a:t>
+            </a:r>
+            <a:r>
+              <a:rPr kumimoji="1" lang="en-US" altLang="ja-JP" sz="2400" dirty="0"/>
+              <a:t>ID</a:t>
+            </a:r>
+            <a:r>
+              <a:rPr kumimoji="1" lang="ja-JP" altLang="en-US" sz="2400" dirty="0"/>
+              <a:t>を生成してクライアントに送る処理を書きます。（その２）</a:t>
+            </a:r>
+            <a:endParaRPr kumimoji="1" lang="en-US" altLang="ja-JP" sz="2400" dirty="0"/>
           </a:p>
         </p:txBody>
       </p:sp>
       <p:pic>
         <p:nvPicPr>
-          <p:cNvPr id="8" name="図 7">
-            <a:extLst>
-              <a:ext uri="{FF2B5EF4-FFF2-40B4-BE49-F238E27FC236}">
-                <a16:creationId xmlns:a16="http://schemas.microsoft.com/office/drawing/2014/main" id="{EC5E43EF-9CDD-43F2-AAC2-1542AF5D5A39}"/>
+          <p:cNvPr id="9" name="図 8">
+            <a:extLst>
+              <a:ext uri="{FF2B5EF4-FFF2-40B4-BE49-F238E27FC236}">
+                <a16:creationId xmlns:a16="http://schemas.microsoft.com/office/drawing/2014/main" id="{7C42604E-0742-4965-BEF2-F1CA1DDB1736}"/>
               </a:ext>
             </a:extLst>
           </p:cNvPr>
@@ -5186,17 +6731,69 @@
         <p:spPr>
           <a:xfrm>
             <a:off x="567542" y="1817794"/>
-            <a:ext cx="4787634" cy="4548252"/>
+            <a:ext cx="7240010" cy="4963218"/>
           </a:xfrm>
           <a:prstGeom prst="rect">
             <a:avLst/>
           </a:prstGeom>
         </p:spPr>
       </p:pic>
+      <p:sp>
+        <p:nvSpPr>
+          <p:cNvPr id="10" name="正方形/長方形 9">
+            <a:extLst>
+              <a:ext uri="{FF2B5EF4-FFF2-40B4-BE49-F238E27FC236}">
+                <a16:creationId xmlns:a16="http://schemas.microsoft.com/office/drawing/2014/main" id="{5E334CFD-603B-4208-B48B-FA4A15ED3346}"/>
+              </a:ext>
+            </a:extLst>
+          </p:cNvPr>
+          <p:cNvSpPr/>
+          <p:nvPr/>
+        </p:nvSpPr>
+        <p:spPr>
+          <a:xfrm>
+            <a:off x="1938867" y="6366045"/>
+            <a:ext cx="2980266" cy="234219"/>
+          </a:xfrm>
+          <a:prstGeom prst="rect">
+            <a:avLst/>
+          </a:prstGeom>
+          <a:noFill/>
+          <a:ln w="38100">
+            <a:solidFill>
+              <a:srgbClr val="FF0000"/>
+            </a:solidFill>
+          </a:ln>
+        </p:spPr>
+        <p:style>
+          <a:lnRef idx="2">
+            <a:schemeClr val="accent1">
+              <a:shade val="50000"/>
+            </a:schemeClr>
+          </a:lnRef>
+          <a:fillRef idx="1">
+            <a:schemeClr val="accent1"/>
+          </a:fillRef>
+          <a:effectRef idx="0">
+            <a:schemeClr val="accent1"/>
+          </a:effectRef>
+          <a:fontRef idx="minor">
+            <a:schemeClr val="lt1"/>
+          </a:fontRef>
+        </p:style>
+        <p:txBody>
+          <a:bodyPr rtlCol="0" anchor="ctr"/>
+          <a:lstStyle/>
+          <a:p>
+            <a:pPr algn="ctr"/>
+            <a:endParaRPr kumimoji="1" lang="ja-JP" altLang="en-US"/>
+          </a:p>
+        </p:txBody>
+      </p:sp>
     </p:spTree>
     <p:extLst>
       <p:ext uri="{BB962C8B-B14F-4D97-AF65-F5344CB8AC3E}">
-        <p14:creationId xmlns:p14="http://schemas.microsoft.com/office/powerpoint/2010/main" val="3987338797"/>
+        <p14:creationId xmlns:p14="http://schemas.microsoft.com/office/powerpoint/2010/main" val="2310851924"/>
       </p:ext>
     </p:extLst>
   </p:cSld>
@@ -5238,7 +6835,7 @@
         <p:spPr>
           <a:xfrm>
             <a:off x="567542" y="491954"/>
-            <a:ext cx="4346062" cy="584775"/>
+            <a:ext cx="1826141" cy="584775"/>
           </a:xfrm>
           <a:prstGeom prst="rect">
             <a:avLst/>
@@ -5252,12 +6849,8 @@
           <a:lstStyle/>
           <a:p>
             <a:r>
-              <a:rPr kumimoji="1" lang="en-US" altLang="ja-JP" sz="3200" b="1" u="sng" dirty="0"/>
-              <a:t>Network</a:t>
-            </a:r>
-            <a:r>
               <a:rPr kumimoji="1" lang="ja-JP" altLang="en-US" sz="3200" b="1" u="sng" dirty="0"/>
-              <a:t>オブジェクト</a:t>
+              <a:t>ログイン</a:t>
             </a:r>
           </a:p>
         </p:txBody>
@@ -5277,7 +6870,7 @@
         <p:spPr>
           <a:xfrm>
             <a:off x="567542" y="1216429"/>
-            <a:ext cx="8802410" cy="830997"/>
+            <a:ext cx="7226658" cy="461665"/>
           </a:xfrm>
           <a:prstGeom prst="rect">
             <a:avLst/>
@@ -5291,34 +6884,35 @@
           <a:lstStyle/>
           <a:p>
             <a:r>
-              <a:rPr lang="ja-JP" altLang="en-US" sz="2400" b="1" dirty="0">
+              <a:rPr kumimoji="1" lang="en-US" altLang="ja-JP" sz="2400" b="1" dirty="0">
                 <a:solidFill>
-                  <a:srgbClr val="FF0000"/>
+                  <a:srgbClr val="0070C0"/>
                 </a:solidFill>
               </a:rPr>
-              <a:t>クライアントは一般的にシーンで管理</a:t>
-            </a:r>
-            <a:r>
-              <a:rPr lang="ja-JP" altLang="en-US" sz="2400" dirty="0"/>
-              <a:t>します。</a:t>
-            </a:r>
-            <a:endParaRPr lang="en-US" altLang="ja-JP" sz="2400" dirty="0"/>
-          </a:p>
-          <a:p>
-            <a:r>
-              <a:rPr lang="ja-JP" altLang="en-US" sz="2400" dirty="0"/>
-              <a:t>この後の受信処理を作る際にも都合よく使うことができます。</a:t>
-            </a:r>
-            <a:endParaRPr lang="en-US" altLang="ja-JP" sz="2400" dirty="0"/>
+              <a:t>Client</a:t>
+            </a:r>
+            <a:r>
+              <a:rPr kumimoji="1" lang="ja-JP" altLang="en-US" sz="2400" b="1" dirty="0">
+                <a:solidFill>
+                  <a:srgbClr val="0070C0"/>
+                </a:solidFill>
+              </a:rPr>
+              <a:t>プロジェクト</a:t>
+            </a:r>
+            <a:r>
+              <a:rPr kumimoji="1" lang="ja-JP" altLang="en-US" sz="2400" dirty="0"/>
+              <a:t>を開き、受信処理を書きます。</a:t>
+            </a:r>
+            <a:endParaRPr kumimoji="1" lang="en-US" altLang="ja-JP" sz="2400" dirty="0"/>
           </a:p>
         </p:txBody>
       </p:sp>
       <p:pic>
         <p:nvPicPr>
-          <p:cNvPr id="7" name="図 6">
-            <a:extLst>
-              <a:ext uri="{FF2B5EF4-FFF2-40B4-BE49-F238E27FC236}">
-                <a16:creationId xmlns:a16="http://schemas.microsoft.com/office/drawing/2014/main" id="{E866BC3F-6AD0-4D01-BF00-3921E9B58F11}"/>
+          <p:cNvPr id="5" name="図 4">
+            <a:extLst>
+              <a:ext uri="{FF2B5EF4-FFF2-40B4-BE49-F238E27FC236}">
+                <a16:creationId xmlns:a16="http://schemas.microsoft.com/office/drawing/2014/main" id="{E747F096-3BA0-4A15-B6C8-02B405E80336}"/>
               </a:ext>
             </a:extLst>
           </p:cNvPr>
@@ -5335,70 +6929,18 @@
         </p:blipFill>
         <p:spPr>
           <a:xfrm>
-            <a:off x="567543" y="2180530"/>
-            <a:ext cx="4258458" cy="4242888"/>
+            <a:off x="567542" y="1817794"/>
+            <a:ext cx="8635725" cy="4641702"/>
           </a:xfrm>
           <a:prstGeom prst="rect">
             <a:avLst/>
           </a:prstGeom>
         </p:spPr>
       </p:pic>
-      <p:sp>
-        <p:nvSpPr>
-          <p:cNvPr id="2" name="正方形/長方形 1">
-            <a:extLst>
-              <a:ext uri="{FF2B5EF4-FFF2-40B4-BE49-F238E27FC236}">
-                <a16:creationId xmlns:a16="http://schemas.microsoft.com/office/drawing/2014/main" id="{D9759BB6-C94E-4577-A25B-38F57A2243DD}"/>
-              </a:ext>
-            </a:extLst>
-          </p:cNvPr>
-          <p:cNvSpPr/>
-          <p:nvPr/>
-        </p:nvSpPr>
-        <p:spPr>
-          <a:xfrm>
-            <a:off x="1320800" y="5641570"/>
-            <a:ext cx="2785533" cy="518117"/>
-          </a:xfrm>
-          <a:prstGeom prst="rect">
-            <a:avLst/>
-          </a:prstGeom>
-          <a:noFill/>
-          <a:ln w="28575">
-            <a:solidFill>
-              <a:srgbClr val="FF0000"/>
-            </a:solidFill>
-          </a:ln>
-        </p:spPr>
-        <p:style>
-          <a:lnRef idx="2">
-            <a:schemeClr val="accent1">
-              <a:shade val="50000"/>
-            </a:schemeClr>
-          </a:lnRef>
-          <a:fillRef idx="1">
-            <a:schemeClr val="accent1"/>
-          </a:fillRef>
-          <a:effectRef idx="0">
-            <a:schemeClr val="accent1"/>
-          </a:effectRef>
-          <a:fontRef idx="minor">
-            <a:schemeClr val="lt1"/>
-          </a:fontRef>
-        </p:style>
-        <p:txBody>
-          <a:bodyPr rtlCol="0" anchor="ctr"/>
-          <a:lstStyle/>
-          <a:p>
-            <a:pPr algn="ctr"/>
-            <a:endParaRPr kumimoji="1" lang="ja-JP" altLang="en-US"/>
-          </a:p>
-        </p:txBody>
-      </p:sp>
     </p:spTree>
     <p:extLst>
       <p:ext uri="{BB962C8B-B14F-4D97-AF65-F5344CB8AC3E}">
-        <p14:creationId xmlns:p14="http://schemas.microsoft.com/office/powerpoint/2010/main" val="2554545658"/>
+        <p14:creationId xmlns:p14="http://schemas.microsoft.com/office/powerpoint/2010/main" val="1858805895"/>
       </p:ext>
     </p:extLst>
   </p:cSld>
@@ -5440,7 +6982,7 @@
         <p:spPr>
           <a:xfrm>
             <a:off x="567542" y="491954"/>
-            <a:ext cx="4346062" cy="584775"/>
+            <a:ext cx="1826141" cy="584775"/>
           </a:xfrm>
           <a:prstGeom prst="rect">
             <a:avLst/>
@@ -5454,12 +6996,8 @@
           <a:lstStyle/>
           <a:p>
             <a:r>
-              <a:rPr kumimoji="1" lang="en-US" altLang="ja-JP" sz="3200" b="1" u="sng" dirty="0"/>
-              <a:t>Network</a:t>
-            </a:r>
-            <a:r>
               <a:rPr kumimoji="1" lang="ja-JP" altLang="en-US" sz="3200" b="1" u="sng" dirty="0"/>
-              <a:t>オブジェクト</a:t>
+              <a:t>ログイン</a:t>
             </a:r>
           </a:p>
         </p:txBody>
@@ -5479,7 +7017,7 @@
         <p:spPr>
           <a:xfrm>
             <a:off x="567542" y="1216429"/>
-            <a:ext cx="10341293" cy="830997"/>
+            <a:ext cx="4846198" cy="461665"/>
           </a:xfrm>
           <a:prstGeom prst="rect">
             <a:avLst/>
@@ -5493,26 +7031,27 @@
           <a:lstStyle/>
           <a:p>
             <a:r>
+              <a:rPr kumimoji="1" lang="en-US" altLang="ja-JP" sz="2400" b="1" dirty="0" err="1">
+                <a:solidFill>
+                  <a:srgbClr val="FF0000"/>
+                </a:solidFill>
+              </a:rPr>
+              <a:t>NetworkPlayScene.h</a:t>
+            </a:r>
+            <a:r>
               <a:rPr lang="ja-JP" altLang="en-US" sz="2400" dirty="0"/>
-              <a:t>オンラインゲームはマッチングが成立するまで詳細が決まりません。</a:t>
-            </a:r>
-            <a:endParaRPr lang="en-US" altLang="ja-JP" sz="2400" dirty="0"/>
-          </a:p>
-          <a:p>
-            <a:r>
-              <a:rPr lang="ja-JP" altLang="en-US" sz="2400" dirty="0"/>
-              <a:t>つまり、オフラインではできていたことができなくなることもあります。</a:t>
-            </a:r>
-            <a:endParaRPr lang="en-US" altLang="ja-JP" sz="2400" dirty="0"/>
+              <a:t>を書きます</a:t>
+            </a:r>
+            <a:endParaRPr kumimoji="1" lang="en-US" altLang="ja-JP" sz="2400" dirty="0"/>
           </a:p>
         </p:txBody>
       </p:sp>
       <p:pic>
         <p:nvPicPr>
-          <p:cNvPr id="5" name="図 4">
-            <a:extLst>
-              <a:ext uri="{FF2B5EF4-FFF2-40B4-BE49-F238E27FC236}">
-                <a16:creationId xmlns:a16="http://schemas.microsoft.com/office/drawing/2014/main" id="{AFC61ADD-3E3B-4E6D-B850-C83E1B4F4004}"/>
+          <p:cNvPr id="3" name="図 2">
+            <a:extLst>
+              <a:ext uri="{FF2B5EF4-FFF2-40B4-BE49-F238E27FC236}">
+                <a16:creationId xmlns:a16="http://schemas.microsoft.com/office/drawing/2014/main" id="{80EC6834-F048-462E-9E4F-3E1F1375A2E8}"/>
               </a:ext>
             </a:extLst>
           </p:cNvPr>
@@ -5529,8 +7068,8 @@
         </p:blipFill>
         <p:spPr>
           <a:xfrm>
-            <a:off x="567542" y="2187126"/>
-            <a:ext cx="7278116" cy="1295581"/>
+            <a:off x="567542" y="1817794"/>
+            <a:ext cx="6515702" cy="4659206"/>
           </a:xfrm>
           <a:prstGeom prst="rect">
             <a:avLst/>
@@ -5539,56 +7078,60 @@
       </p:pic>
       <p:sp>
         <p:nvSpPr>
-          <p:cNvPr id="8" name="テキスト ボックス 7">
-            <a:extLst>
-              <a:ext uri="{FF2B5EF4-FFF2-40B4-BE49-F238E27FC236}">
-                <a16:creationId xmlns:a16="http://schemas.microsoft.com/office/drawing/2014/main" id="{EB303BF0-915A-4EB3-B0C0-6543C55F1FF9}"/>
-              </a:ext>
-            </a:extLst>
-          </p:cNvPr>
-          <p:cNvSpPr txBox="1"/>
-          <p:nvPr/>
-        </p:nvSpPr>
-        <p:spPr>
-          <a:xfrm>
-            <a:off x="567541" y="3625133"/>
-            <a:ext cx="5174815" cy="461665"/>
+          <p:cNvPr id="7" name="正方形/長方形 6">
+            <a:extLst>
+              <a:ext uri="{FF2B5EF4-FFF2-40B4-BE49-F238E27FC236}">
+                <a16:creationId xmlns:a16="http://schemas.microsoft.com/office/drawing/2014/main" id="{385B7E4D-310A-4C87-91E6-28339942176B}"/>
+              </a:ext>
+            </a:extLst>
+          </p:cNvPr>
+          <p:cNvSpPr/>
+          <p:nvPr/>
+        </p:nvSpPr>
+        <p:spPr>
+          <a:xfrm>
+            <a:off x="2099733" y="5884333"/>
+            <a:ext cx="2971800" cy="372534"/>
           </a:xfrm>
           <a:prstGeom prst="rect">
             <a:avLst/>
           </a:prstGeom>
           <a:noFill/>
-        </p:spPr>
-        <p:txBody>
-          <a:bodyPr wrap="none" rtlCol="0">
-            <a:spAutoFit/>
-          </a:bodyPr>
-          <a:lstStyle/>
-          <a:p>
-            <a:r>
-              <a:rPr lang="ja-JP" altLang="en-US" sz="2400" dirty="0"/>
-              <a:t>続いて</a:t>
-            </a:r>
-            <a:r>
-              <a:rPr lang="en-US" altLang="ja-JP" sz="2400" b="1" dirty="0" err="1">
-                <a:solidFill>
-                  <a:srgbClr val="00B050"/>
-                </a:solidFill>
-              </a:rPr>
-              <a:t>NetworkPlayer</a:t>
-            </a:r>
-            <a:r>
-              <a:rPr lang="ja-JP" altLang="en-US" sz="2400" dirty="0"/>
-              <a:t>を作ります。</a:t>
-            </a:r>
-            <a:endParaRPr lang="en-US" altLang="ja-JP" sz="2400" dirty="0"/>
+          <a:ln w="38100">
+            <a:solidFill>
+              <a:srgbClr val="FF0000"/>
+            </a:solidFill>
+          </a:ln>
+        </p:spPr>
+        <p:style>
+          <a:lnRef idx="2">
+            <a:schemeClr val="accent1">
+              <a:shade val="50000"/>
+            </a:schemeClr>
+          </a:lnRef>
+          <a:fillRef idx="1">
+            <a:schemeClr val="accent1"/>
+          </a:fillRef>
+          <a:effectRef idx="0">
+            <a:schemeClr val="accent1"/>
+          </a:effectRef>
+          <a:fontRef idx="minor">
+            <a:schemeClr val="lt1"/>
+          </a:fontRef>
+        </p:style>
+        <p:txBody>
+          <a:bodyPr rtlCol="0" anchor="ctr"/>
+          <a:lstStyle/>
+          <a:p>
+            <a:pPr algn="ctr"/>
+            <a:endParaRPr kumimoji="1" lang="ja-JP" altLang="en-US"/>
           </a:p>
         </p:txBody>
       </p:sp>
     </p:spTree>
     <p:extLst>
       <p:ext uri="{BB962C8B-B14F-4D97-AF65-F5344CB8AC3E}">
-        <p14:creationId xmlns:p14="http://schemas.microsoft.com/office/powerpoint/2010/main" val="43678326"/>
+        <p14:creationId xmlns:p14="http://schemas.microsoft.com/office/powerpoint/2010/main" val="4159970250"/>
       </p:ext>
     </p:extLst>
   </p:cSld>
@@ -5630,7 +7173,7 @@
         <p:spPr>
           <a:xfrm>
             <a:off x="567542" y="491954"/>
-            <a:ext cx="4346062" cy="584775"/>
+            <a:ext cx="1826141" cy="584775"/>
           </a:xfrm>
           <a:prstGeom prst="rect">
             <a:avLst/>
@@ -5644,12 +7187,8 @@
           <a:lstStyle/>
           <a:p>
             <a:r>
-              <a:rPr kumimoji="1" lang="en-US" altLang="ja-JP" sz="3200" b="1" u="sng" dirty="0"/>
-              <a:t>Network</a:t>
-            </a:r>
-            <a:r>
               <a:rPr kumimoji="1" lang="ja-JP" altLang="en-US" sz="3200" b="1" u="sng" dirty="0"/>
-              <a:t>オブジェクト</a:t>
+              <a:t>ログイン</a:t>
             </a:r>
           </a:p>
         </p:txBody>
@@ -5669,7 +7208,7 @@
         <p:spPr>
           <a:xfrm>
             <a:off x="567542" y="1216429"/>
-            <a:ext cx="8670963" cy="461665"/>
+            <a:ext cx="5203669" cy="461665"/>
           </a:xfrm>
           <a:prstGeom prst="rect">
             <a:avLst/>
@@ -5683,26 +7222,18 @@
           <a:lstStyle/>
           <a:p>
             <a:r>
-              <a:rPr lang="en-US" altLang="ja-JP" sz="2400" dirty="0"/>
-              <a:t>Player</a:t>
-            </a:r>
-            <a:r>
-              <a:rPr lang="ja-JP" altLang="en-US" sz="2400" dirty="0"/>
-              <a:t>フォルダに</a:t>
-            </a:r>
-            <a:r>
-              <a:rPr lang="en-US" altLang="ja-JP" sz="2400" b="1" dirty="0">
+              <a:rPr kumimoji="1" lang="en-US" altLang="ja-JP" sz="2400" b="1" dirty="0">
                 <a:solidFill>
                   <a:srgbClr val="FF0000"/>
                 </a:solidFill>
               </a:rPr>
-              <a:t>NetworkPlayer.cpp/.h</a:t>
+              <a:t>NetworkPlayScene.cpp</a:t>
             </a:r>
             <a:r>
               <a:rPr lang="ja-JP" altLang="en-US" sz="2400" dirty="0"/>
-              <a:t>を追加しましょう。</a:t>
-            </a:r>
-            <a:endParaRPr lang="en-US" altLang="ja-JP" sz="2400" dirty="0"/>
+              <a:t>を書きます</a:t>
+            </a:r>
+            <a:endParaRPr kumimoji="1" lang="en-US" altLang="ja-JP" sz="2400" dirty="0"/>
           </a:p>
         </p:txBody>
       </p:sp>
@@ -5711,7 +7242,7 @@
           <p:cNvPr id="5" name="図 4">
             <a:extLst>
               <a:ext uri="{FF2B5EF4-FFF2-40B4-BE49-F238E27FC236}">
-                <a16:creationId xmlns:a16="http://schemas.microsoft.com/office/drawing/2014/main" id="{FDDD12F2-6D97-46EC-8991-06FC443A0D8E}"/>
+                <a16:creationId xmlns:a16="http://schemas.microsoft.com/office/drawing/2014/main" id="{B1D67207-8DAA-41F3-95A0-9C8CE712DCD8}"/>
               </a:ext>
             </a:extLst>
           </p:cNvPr>
@@ -5729,17 +7260,183 @@
         <p:spPr>
           <a:xfrm>
             <a:off x="567542" y="1817794"/>
-            <a:ext cx="3343094" cy="3423073"/>
+            <a:ext cx="8440328" cy="2200582"/>
           </a:xfrm>
           <a:prstGeom prst="rect">
             <a:avLst/>
           </a:prstGeom>
         </p:spPr>
       </p:pic>
+      <p:pic>
+        <p:nvPicPr>
+          <p:cNvPr id="10" name="図 9">
+            <a:extLst>
+              <a:ext uri="{FF2B5EF4-FFF2-40B4-BE49-F238E27FC236}">
+                <a16:creationId xmlns:a16="http://schemas.microsoft.com/office/drawing/2014/main" id="{F53FA6A5-674A-4BA1-B8EB-EDFE4A361C14}"/>
+              </a:ext>
+            </a:extLst>
+          </p:cNvPr>
+          <p:cNvPicPr>
+            <a:picLocks noChangeAspect="1"/>
+          </p:cNvPicPr>
+          <p:nvPr/>
+        </p:nvPicPr>
+        <p:blipFill>
+          <a:blip r:embed="rId3"/>
+          <a:stretch>
+            <a:fillRect/>
+          </a:stretch>
+        </p:blipFill>
+        <p:spPr>
+          <a:xfrm>
+            <a:off x="567542" y="4664513"/>
+            <a:ext cx="10150519" cy="1465354"/>
+          </a:xfrm>
+          <a:prstGeom prst="rect">
+            <a:avLst/>
+          </a:prstGeom>
+        </p:spPr>
+      </p:pic>
+      <p:sp>
+        <p:nvSpPr>
+          <p:cNvPr id="12" name="正方形/長方形 11">
+            <a:extLst>
+              <a:ext uri="{FF2B5EF4-FFF2-40B4-BE49-F238E27FC236}">
+                <a16:creationId xmlns:a16="http://schemas.microsoft.com/office/drawing/2014/main" id="{97EA0E2E-D135-403D-A683-22481049B95A}"/>
+              </a:ext>
+            </a:extLst>
+          </p:cNvPr>
+          <p:cNvSpPr/>
+          <p:nvPr/>
+        </p:nvSpPr>
+        <p:spPr>
+          <a:xfrm>
+            <a:off x="2937933" y="5113866"/>
+            <a:ext cx="7780128" cy="372534"/>
+          </a:xfrm>
+          <a:prstGeom prst="rect">
+            <a:avLst/>
+          </a:prstGeom>
+          <a:noFill/>
+          <a:ln w="38100">
+            <a:solidFill>
+              <a:srgbClr val="FF0000"/>
+            </a:solidFill>
+          </a:ln>
+        </p:spPr>
+        <p:style>
+          <a:lnRef idx="2">
+            <a:schemeClr val="accent1">
+              <a:shade val="50000"/>
+            </a:schemeClr>
+          </a:lnRef>
+          <a:fillRef idx="1">
+            <a:schemeClr val="accent1"/>
+          </a:fillRef>
+          <a:effectRef idx="0">
+            <a:schemeClr val="accent1"/>
+          </a:effectRef>
+          <a:fontRef idx="minor">
+            <a:schemeClr val="lt1"/>
+          </a:fontRef>
+        </p:style>
+        <p:txBody>
+          <a:bodyPr rtlCol="0" anchor="ctr"/>
+          <a:lstStyle/>
+          <a:p>
+            <a:pPr algn="ctr"/>
+            <a:endParaRPr kumimoji="1" lang="ja-JP" altLang="en-US"/>
+          </a:p>
+        </p:txBody>
+      </p:sp>
+      <p:cxnSp>
+        <p:nvCxnSpPr>
+          <p:cNvPr id="14" name="直線コネクタ 13">
+            <a:extLst>
+              <a:ext uri="{FF2B5EF4-FFF2-40B4-BE49-F238E27FC236}">
+                <a16:creationId xmlns:a16="http://schemas.microsoft.com/office/drawing/2014/main" id="{5AA6EC17-7004-4AD4-AFF3-BAF5286BF6C6}"/>
+              </a:ext>
+            </a:extLst>
+          </p:cNvPr>
+          <p:cNvCxnSpPr/>
+          <p:nvPr/>
+        </p:nvCxnSpPr>
+        <p:spPr>
+          <a:xfrm>
+            <a:off x="567542" y="4326466"/>
+            <a:ext cx="10439125" cy="0"/>
+          </a:xfrm>
+          <a:prstGeom prst="line">
+            <a:avLst/>
+          </a:prstGeom>
+        </p:spPr>
+        <p:style>
+          <a:lnRef idx="1">
+            <a:schemeClr val="accent1"/>
+          </a:lnRef>
+          <a:fillRef idx="0">
+            <a:schemeClr val="accent1"/>
+          </a:fillRef>
+          <a:effectRef idx="0">
+            <a:schemeClr val="accent1"/>
+          </a:effectRef>
+          <a:fontRef idx="minor">
+            <a:schemeClr val="tx1"/>
+          </a:fontRef>
+        </p:style>
+      </p:cxnSp>
+      <p:sp>
+        <p:nvSpPr>
+          <p:cNvPr id="15" name="テキスト ボックス 14">
+            <a:extLst>
+              <a:ext uri="{FF2B5EF4-FFF2-40B4-BE49-F238E27FC236}">
+                <a16:creationId xmlns:a16="http://schemas.microsoft.com/office/drawing/2014/main" id="{2FDA8E62-2008-4F33-AB40-68F1B937E5D8}"/>
+              </a:ext>
+            </a:extLst>
+          </p:cNvPr>
+          <p:cNvSpPr txBox="1"/>
+          <p:nvPr/>
+        </p:nvSpPr>
+        <p:spPr>
+          <a:xfrm>
+            <a:off x="567541" y="6237080"/>
+            <a:ext cx="3877985" cy="461665"/>
+          </a:xfrm>
+          <a:prstGeom prst="rect">
+            <a:avLst/>
+          </a:prstGeom>
+          <a:noFill/>
+        </p:spPr>
+        <p:txBody>
+          <a:bodyPr wrap="none" rtlCol="0">
+            <a:spAutoFit/>
+          </a:bodyPr>
+          <a:lstStyle/>
+          <a:p>
+            <a:r>
+              <a:rPr kumimoji="1" lang="en-US" altLang="ja-JP" sz="2400" b="1" dirty="0">
+                <a:solidFill>
+                  <a:srgbClr val="FF0000"/>
+                </a:solidFill>
+              </a:rPr>
+              <a:t>※</a:t>
+            </a:r>
+            <a:r>
+              <a:rPr kumimoji="1" lang="ja-JP" altLang="en-US" sz="2400" b="1" dirty="0">
+                <a:solidFill>
+                  <a:srgbClr val="FF0000"/>
+                </a:solidFill>
+              </a:rPr>
+              <a:t>動作確認してみましょう</a:t>
+            </a:r>
+            <a:endParaRPr kumimoji="1" lang="en-US" altLang="ja-JP" sz="2400" dirty="0"/>
+          </a:p>
+        </p:txBody>
+      </p:sp>
     </p:spTree>
     <p:extLst>
       <p:ext uri="{BB962C8B-B14F-4D97-AF65-F5344CB8AC3E}">
-        <p14:creationId xmlns:p14="http://schemas.microsoft.com/office/powerpoint/2010/main" val="101949363"/>
+        <p14:creationId xmlns:p14="http://schemas.microsoft.com/office/powerpoint/2010/main" val="2800447990"/>
       </p:ext>
     </p:extLst>
   </p:cSld>
@@ -5781,7 +7478,7 @@
         <p:spPr>
           <a:xfrm>
             <a:off x="567542" y="491954"/>
-            <a:ext cx="4346062" cy="584775"/>
+            <a:ext cx="1826141" cy="584775"/>
           </a:xfrm>
           <a:prstGeom prst="rect">
             <a:avLst/>
@@ -5795,12 +7492,8 @@
           <a:lstStyle/>
           <a:p>
             <a:r>
-              <a:rPr kumimoji="1" lang="en-US" altLang="ja-JP" sz="3200" b="1" u="sng" dirty="0"/>
-              <a:t>Network</a:t>
-            </a:r>
-            <a:r>
               <a:rPr kumimoji="1" lang="ja-JP" altLang="en-US" sz="3200" b="1" u="sng" dirty="0"/>
-              <a:t>オブジェクト</a:t>
+              <a:t>ログイン</a:t>
             </a:r>
           </a:p>
         </p:txBody>
@@ -5820,7 +7513,7 @@
         <p:spPr>
           <a:xfrm>
             <a:off x="567542" y="1216429"/>
-            <a:ext cx="4528804" cy="461665"/>
+            <a:ext cx="11607665" cy="1200329"/>
           </a:xfrm>
           <a:prstGeom prst="rect">
             <a:avLst/>
@@ -5834,55 +7527,1039 @@
           <a:lstStyle/>
           <a:p>
             <a:r>
-              <a:rPr lang="en-US" altLang="ja-JP" sz="2400" b="1" dirty="0" err="1">
+              <a:rPr kumimoji="1" lang="en-US" altLang="ja-JP" sz="2400" dirty="0"/>
+              <a:t>2</a:t>
+            </a:r>
+            <a:r>
+              <a:rPr kumimoji="1" lang="ja-JP" altLang="en-US" sz="2400" dirty="0"/>
+              <a:t>人目、</a:t>
+            </a:r>
+            <a:r>
+              <a:rPr kumimoji="1" lang="en-US" altLang="ja-JP" sz="2400" dirty="0"/>
+              <a:t>3</a:t>
+            </a:r>
+            <a:r>
+              <a:rPr kumimoji="1" lang="ja-JP" altLang="en-US" sz="2400" dirty="0"/>
+              <a:t>人目とログインしてきた場合、プレイヤーを追加しなければいけません。</a:t>
+            </a:r>
+            <a:endParaRPr kumimoji="1" lang="en-US" altLang="ja-JP" sz="2400" dirty="0"/>
+          </a:p>
+          <a:p>
+            <a:r>
+              <a:rPr lang="ja-JP" altLang="en-US" sz="2400" dirty="0"/>
+              <a:t>この場合、すでにログインしているクライアント全員に追加のプレイヤーデータを</a:t>
+            </a:r>
+            <a:endParaRPr lang="en-US" altLang="ja-JP" sz="2400" dirty="0"/>
+          </a:p>
+          <a:p>
+            <a:r>
+              <a:rPr kumimoji="1" lang="ja-JP" altLang="en-US" sz="2400" dirty="0"/>
+              <a:t>共有する必要があります。</a:t>
+            </a:r>
+            <a:endParaRPr kumimoji="1" lang="en-US" altLang="ja-JP" sz="2400" dirty="0"/>
+          </a:p>
+        </p:txBody>
+      </p:sp>
+      <p:sp>
+        <p:nvSpPr>
+          <p:cNvPr id="7" name="テキスト ボックス 6">
+            <a:extLst>
+              <a:ext uri="{FF2B5EF4-FFF2-40B4-BE49-F238E27FC236}">
+                <a16:creationId xmlns:a16="http://schemas.microsoft.com/office/drawing/2014/main" id="{3BC32E2B-08FB-4C85-9154-A673C707A66E}"/>
+              </a:ext>
+            </a:extLst>
+          </p:cNvPr>
+          <p:cNvSpPr txBox="1"/>
+          <p:nvPr/>
+        </p:nvSpPr>
+        <p:spPr>
+          <a:xfrm>
+            <a:off x="788190" y="2925233"/>
+            <a:ext cx="1556836" cy="338554"/>
+          </a:xfrm>
+          <a:prstGeom prst="rect">
+            <a:avLst/>
+          </a:prstGeom>
+          <a:noFill/>
+        </p:spPr>
+        <p:txBody>
+          <a:bodyPr wrap="none" rtlCol="0">
+            <a:spAutoFit/>
+          </a:bodyPr>
+          <a:lstStyle/>
+          <a:p>
+            <a:r>
+              <a:rPr kumimoji="1" lang="ja-JP" altLang="en-US" sz="1600" b="1" dirty="0">
                 <a:solidFill>
-                  <a:srgbClr val="FF0000"/>
+                  <a:srgbClr val="0070C0"/>
                 </a:solidFill>
               </a:rPr>
-              <a:t>NetworkPlayer.h</a:t>
-            </a:r>
-            <a:r>
-              <a:rPr lang="ja-JP" altLang="en-US" sz="2400" dirty="0"/>
-              <a:t>を書きます。</a:t>
-            </a:r>
-            <a:endParaRPr lang="en-US" altLang="ja-JP" sz="2400" dirty="0"/>
-          </a:p>
-        </p:txBody>
-      </p:sp>
-      <p:pic>
-        <p:nvPicPr>
-          <p:cNvPr id="3" name="図 2">
-            <a:extLst>
-              <a:ext uri="{FF2B5EF4-FFF2-40B4-BE49-F238E27FC236}">
-                <a16:creationId xmlns:a16="http://schemas.microsoft.com/office/drawing/2014/main" id="{8143FD9F-6139-4236-859B-96D70A24B51C}"/>
-              </a:ext>
-            </a:extLst>
-          </p:cNvPr>
-          <p:cNvPicPr>
-            <a:picLocks noChangeAspect="1"/>
-          </p:cNvPicPr>
-          <p:nvPr/>
-        </p:nvPicPr>
-        <p:blipFill>
-          <a:blip r:embed="rId2"/>
-          <a:stretch>
-            <a:fillRect/>
-          </a:stretch>
-        </p:blipFill>
-        <p:spPr>
-          <a:xfrm>
-            <a:off x="488823" y="1817794"/>
-            <a:ext cx="6919511" cy="4802295"/>
-          </a:xfrm>
-          <a:prstGeom prst="rect">
-            <a:avLst/>
-          </a:prstGeom>
-        </p:spPr>
-      </p:pic>
+              <a:t>クライアント</a:t>
+            </a:r>
+            <a:r>
+              <a:rPr kumimoji="1" lang="en-US" altLang="ja-JP" sz="1600" b="1" dirty="0">
+                <a:solidFill>
+                  <a:srgbClr val="0070C0"/>
+                </a:solidFill>
+              </a:rPr>
+              <a:t>A</a:t>
+            </a:r>
+            <a:endParaRPr lang="en-US" altLang="ja-JP" sz="1600" b="1" dirty="0">
+              <a:solidFill>
+                <a:srgbClr val="0070C0"/>
+              </a:solidFill>
+            </a:endParaRPr>
+          </a:p>
+        </p:txBody>
+      </p:sp>
+      <p:sp>
+        <p:nvSpPr>
+          <p:cNvPr id="5" name="正方形/長方形 4">
+            <a:extLst>
+              <a:ext uri="{FF2B5EF4-FFF2-40B4-BE49-F238E27FC236}">
+                <a16:creationId xmlns:a16="http://schemas.microsoft.com/office/drawing/2014/main" id="{669CE799-BA1F-420A-A338-12FBE6C15727}"/>
+              </a:ext>
+            </a:extLst>
+          </p:cNvPr>
+          <p:cNvSpPr/>
+          <p:nvPr/>
+        </p:nvSpPr>
+        <p:spPr>
+          <a:xfrm>
+            <a:off x="567542" y="3429000"/>
+            <a:ext cx="1998133" cy="2346887"/>
+          </a:xfrm>
+          <a:prstGeom prst="rect">
+            <a:avLst/>
+          </a:prstGeom>
+        </p:spPr>
+        <p:style>
+          <a:lnRef idx="2">
+            <a:schemeClr val="accent1">
+              <a:shade val="50000"/>
+            </a:schemeClr>
+          </a:lnRef>
+          <a:fillRef idx="1">
+            <a:schemeClr val="accent1"/>
+          </a:fillRef>
+          <a:effectRef idx="0">
+            <a:schemeClr val="accent1"/>
+          </a:effectRef>
+          <a:fontRef idx="minor">
+            <a:schemeClr val="lt1"/>
+          </a:fontRef>
+        </p:style>
+        <p:txBody>
+          <a:bodyPr rtlCol="0" anchor="ctr"/>
+          <a:lstStyle/>
+          <a:p>
+            <a:pPr algn="ctr"/>
+            <a:endParaRPr kumimoji="1" lang="ja-JP" altLang="en-US"/>
+          </a:p>
+        </p:txBody>
+      </p:sp>
+      <p:sp>
+        <p:nvSpPr>
+          <p:cNvPr id="9" name="正方形/長方形 8">
+            <a:extLst>
+              <a:ext uri="{FF2B5EF4-FFF2-40B4-BE49-F238E27FC236}">
+                <a16:creationId xmlns:a16="http://schemas.microsoft.com/office/drawing/2014/main" id="{E8D068BB-7649-4787-A9A5-5BFEC622B502}"/>
+              </a:ext>
+            </a:extLst>
+          </p:cNvPr>
+          <p:cNvSpPr/>
+          <p:nvPr/>
+        </p:nvSpPr>
+        <p:spPr>
+          <a:xfrm>
+            <a:off x="6629675" y="3429000"/>
+            <a:ext cx="1998133" cy="2346887"/>
+          </a:xfrm>
+          <a:prstGeom prst="rect">
+            <a:avLst/>
+          </a:prstGeom>
+        </p:spPr>
+        <p:style>
+          <a:lnRef idx="2">
+            <a:schemeClr val="accent6">
+              <a:shade val="50000"/>
+            </a:schemeClr>
+          </a:lnRef>
+          <a:fillRef idx="1">
+            <a:schemeClr val="accent6"/>
+          </a:fillRef>
+          <a:effectRef idx="0">
+            <a:schemeClr val="accent6"/>
+          </a:effectRef>
+          <a:fontRef idx="minor">
+            <a:schemeClr val="lt1"/>
+          </a:fontRef>
+        </p:style>
+        <p:txBody>
+          <a:bodyPr rtlCol="0" anchor="ctr"/>
+          <a:lstStyle/>
+          <a:p>
+            <a:pPr algn="ctr"/>
+            <a:endParaRPr kumimoji="1" lang="ja-JP" altLang="en-US"/>
+          </a:p>
+        </p:txBody>
+      </p:sp>
+      <p:sp>
+        <p:nvSpPr>
+          <p:cNvPr id="10" name="テキスト ボックス 9">
+            <a:extLst>
+              <a:ext uri="{FF2B5EF4-FFF2-40B4-BE49-F238E27FC236}">
+                <a16:creationId xmlns:a16="http://schemas.microsoft.com/office/drawing/2014/main" id="{F466A805-61B0-489C-97CB-56130C0754D1}"/>
+              </a:ext>
+            </a:extLst>
+          </p:cNvPr>
+          <p:cNvSpPr txBox="1"/>
+          <p:nvPr/>
+        </p:nvSpPr>
+        <p:spPr>
+          <a:xfrm>
+            <a:off x="7126039" y="2950746"/>
+            <a:ext cx="1005403" cy="338554"/>
+          </a:xfrm>
+          <a:prstGeom prst="rect">
+            <a:avLst/>
+          </a:prstGeom>
+          <a:noFill/>
+        </p:spPr>
+        <p:txBody>
+          <a:bodyPr wrap="none" rtlCol="0">
+            <a:spAutoFit/>
+          </a:bodyPr>
+          <a:lstStyle/>
+          <a:p>
+            <a:r>
+              <a:rPr kumimoji="1" lang="ja-JP" altLang="en-US" sz="1600" b="1" dirty="0">
+                <a:solidFill>
+                  <a:srgbClr val="00B050"/>
+                </a:solidFill>
+              </a:rPr>
+              <a:t>サーバー</a:t>
+            </a:r>
+            <a:endParaRPr lang="en-US" altLang="ja-JP" sz="1600" b="1" dirty="0">
+              <a:solidFill>
+                <a:srgbClr val="00B050"/>
+              </a:solidFill>
+            </a:endParaRPr>
+          </a:p>
+        </p:txBody>
+      </p:sp>
+      <p:sp>
+        <p:nvSpPr>
+          <p:cNvPr id="11" name="正方形/長方形 10">
+            <a:extLst>
+              <a:ext uri="{FF2B5EF4-FFF2-40B4-BE49-F238E27FC236}">
+                <a16:creationId xmlns:a16="http://schemas.microsoft.com/office/drawing/2014/main" id="{8EDB46D4-8A6C-4BB5-8134-ACEBA23380BB}"/>
+              </a:ext>
+            </a:extLst>
+          </p:cNvPr>
+          <p:cNvSpPr/>
+          <p:nvPr/>
+        </p:nvSpPr>
+        <p:spPr>
+          <a:xfrm>
+            <a:off x="7039114" y="3707701"/>
+            <a:ext cx="1422401" cy="1721052"/>
+          </a:xfrm>
+          <a:prstGeom prst="rect">
+            <a:avLst/>
+          </a:prstGeom>
+        </p:spPr>
+        <p:style>
+          <a:lnRef idx="2">
+            <a:schemeClr val="accent2"/>
+          </a:lnRef>
+          <a:fillRef idx="1">
+            <a:schemeClr val="lt1"/>
+          </a:fillRef>
+          <a:effectRef idx="0">
+            <a:schemeClr val="accent2"/>
+          </a:effectRef>
+          <a:fontRef idx="minor">
+            <a:schemeClr val="dk1"/>
+          </a:fontRef>
+        </p:style>
+        <p:txBody>
+          <a:bodyPr rtlCol="0" anchor="ctr"/>
+          <a:lstStyle/>
+          <a:p>
+            <a:pPr algn="ctr"/>
+            <a:r>
+              <a:rPr kumimoji="1" lang="en-US" altLang="ja-JP" sz="1200" b="1" dirty="0"/>
+              <a:t>ID</a:t>
+            </a:r>
+            <a:r>
+              <a:rPr kumimoji="1" lang="ja-JP" altLang="en-US" sz="1200" b="1" dirty="0"/>
+              <a:t>生成</a:t>
+            </a:r>
+            <a:endParaRPr kumimoji="1" lang="en-US" altLang="ja-JP" sz="1200" b="1" dirty="0"/>
+          </a:p>
+          <a:p>
+            <a:pPr algn="ctr"/>
+            <a:r>
+              <a:rPr kumimoji="1" lang="ja-JP" altLang="en-US" sz="1200" b="1" dirty="0"/>
+              <a:t>全員に</a:t>
+            </a:r>
+            <a:r>
+              <a:rPr lang="ja-JP" altLang="en-US" sz="1200" b="1" dirty="0"/>
+              <a:t>通達</a:t>
+            </a:r>
+            <a:endParaRPr kumimoji="1" lang="en-US" altLang="ja-JP" sz="1200" b="1" dirty="0"/>
+          </a:p>
+        </p:txBody>
+      </p:sp>
+      <p:sp>
+        <p:nvSpPr>
+          <p:cNvPr id="12" name="矢印: 右 11">
+            <a:extLst>
+              <a:ext uri="{FF2B5EF4-FFF2-40B4-BE49-F238E27FC236}">
+                <a16:creationId xmlns:a16="http://schemas.microsoft.com/office/drawing/2014/main" id="{96BB847F-CC54-4269-9516-EDD8B239294F}"/>
+              </a:ext>
+            </a:extLst>
+          </p:cNvPr>
+          <p:cNvSpPr/>
+          <p:nvPr/>
+        </p:nvSpPr>
+        <p:spPr>
+          <a:xfrm rot="2008423">
+            <a:off x="5630882" y="3511864"/>
+            <a:ext cx="1553719" cy="457200"/>
+          </a:xfrm>
+          <a:prstGeom prst="rightArrow">
+            <a:avLst/>
+          </a:prstGeom>
+        </p:spPr>
+        <p:style>
+          <a:lnRef idx="2">
+            <a:schemeClr val="accent5">
+              <a:shade val="50000"/>
+            </a:schemeClr>
+          </a:lnRef>
+          <a:fillRef idx="1">
+            <a:schemeClr val="accent5"/>
+          </a:fillRef>
+          <a:effectRef idx="0">
+            <a:schemeClr val="accent5"/>
+          </a:effectRef>
+          <a:fontRef idx="minor">
+            <a:schemeClr val="lt1"/>
+          </a:fontRef>
+        </p:style>
+        <p:txBody>
+          <a:bodyPr rtlCol="0" anchor="ctr"/>
+          <a:lstStyle/>
+          <a:p>
+            <a:pPr algn="ctr"/>
+            <a:r>
+              <a:rPr kumimoji="1" lang="ja-JP" altLang="en-US" b="1" dirty="0"/>
+              <a:t>誰かが接続</a:t>
+            </a:r>
+          </a:p>
+        </p:txBody>
+      </p:sp>
+      <p:sp>
+        <p:nvSpPr>
+          <p:cNvPr id="13" name="矢印: 左 12">
+            <a:extLst>
+              <a:ext uri="{FF2B5EF4-FFF2-40B4-BE49-F238E27FC236}">
+                <a16:creationId xmlns:a16="http://schemas.microsoft.com/office/drawing/2014/main" id="{4B1B2CF8-0C1D-4512-9BE8-36965416806C}"/>
+              </a:ext>
+            </a:extLst>
+          </p:cNvPr>
+          <p:cNvSpPr/>
+          <p:nvPr/>
+        </p:nvSpPr>
+        <p:spPr>
+          <a:xfrm>
+            <a:off x="2134504" y="4732684"/>
+            <a:ext cx="4926342" cy="524933"/>
+          </a:xfrm>
+          <a:prstGeom prst="leftArrow">
+            <a:avLst/>
+          </a:prstGeom>
+          <a:solidFill>
+            <a:schemeClr val="accent6">
+              <a:lumMod val="75000"/>
+            </a:schemeClr>
+          </a:solidFill>
+        </p:spPr>
+        <p:style>
+          <a:lnRef idx="2">
+            <a:schemeClr val="accent6">
+              <a:shade val="50000"/>
+            </a:schemeClr>
+          </a:lnRef>
+          <a:fillRef idx="1">
+            <a:schemeClr val="accent6"/>
+          </a:fillRef>
+          <a:effectRef idx="0">
+            <a:schemeClr val="accent6"/>
+          </a:effectRef>
+          <a:fontRef idx="minor">
+            <a:schemeClr val="lt1"/>
+          </a:fontRef>
+        </p:style>
+        <p:txBody>
+          <a:bodyPr rtlCol="0" anchor="ctr"/>
+          <a:lstStyle/>
+          <a:p>
+            <a:pPr algn="ctr"/>
+            <a:r>
+              <a:rPr kumimoji="1" lang="ja-JP" altLang="en-US" b="1" dirty="0"/>
+              <a:t>参加してきたプレイヤー</a:t>
+            </a:r>
+            <a:r>
+              <a:rPr kumimoji="1" lang="en-US" altLang="ja-JP" b="1" dirty="0"/>
+              <a:t>ID</a:t>
+            </a:r>
+            <a:endParaRPr kumimoji="1" lang="ja-JP" altLang="en-US" b="1" dirty="0"/>
+          </a:p>
+        </p:txBody>
+      </p:sp>
+      <p:sp>
+        <p:nvSpPr>
+          <p:cNvPr id="14" name="正方形/長方形 13">
+            <a:extLst>
+              <a:ext uri="{FF2B5EF4-FFF2-40B4-BE49-F238E27FC236}">
+                <a16:creationId xmlns:a16="http://schemas.microsoft.com/office/drawing/2014/main" id="{268D8CD3-1398-42A5-B3E5-877D5B1943F4}"/>
+              </a:ext>
+            </a:extLst>
+          </p:cNvPr>
+          <p:cNvSpPr/>
+          <p:nvPr/>
+        </p:nvSpPr>
+        <p:spPr>
+          <a:xfrm>
+            <a:off x="858724" y="4644776"/>
+            <a:ext cx="1251864" cy="606177"/>
+          </a:xfrm>
+          <a:prstGeom prst="rect">
+            <a:avLst/>
+          </a:prstGeom>
+        </p:spPr>
+        <p:style>
+          <a:lnRef idx="2">
+            <a:schemeClr val="accent2"/>
+          </a:lnRef>
+          <a:fillRef idx="1">
+            <a:schemeClr val="lt1"/>
+          </a:fillRef>
+          <a:effectRef idx="0">
+            <a:schemeClr val="accent2"/>
+          </a:effectRef>
+          <a:fontRef idx="minor">
+            <a:schemeClr val="dk1"/>
+          </a:fontRef>
+        </p:style>
+        <p:txBody>
+          <a:bodyPr rtlCol="0" anchor="ctr"/>
+          <a:lstStyle/>
+          <a:p>
+            <a:pPr algn="ctr"/>
+            <a:r>
+              <a:rPr lang="ja-JP" altLang="en-US" sz="1100" b="1" dirty="0"/>
+              <a:t>プレイヤー追加</a:t>
+            </a:r>
+            <a:endParaRPr kumimoji="1" lang="ja-JP" altLang="en-US" sz="1100" b="1" dirty="0"/>
+          </a:p>
+        </p:txBody>
+      </p:sp>
+      <p:sp>
+        <p:nvSpPr>
+          <p:cNvPr id="15" name="正方形/長方形 14">
+            <a:extLst>
+              <a:ext uri="{FF2B5EF4-FFF2-40B4-BE49-F238E27FC236}">
+                <a16:creationId xmlns:a16="http://schemas.microsoft.com/office/drawing/2014/main" id="{AB6CB4A6-511D-43AA-9BAC-3A5204951856}"/>
+              </a:ext>
+            </a:extLst>
+          </p:cNvPr>
+          <p:cNvSpPr/>
+          <p:nvPr/>
+        </p:nvSpPr>
+        <p:spPr>
+          <a:xfrm>
+            <a:off x="9761923" y="2814900"/>
+            <a:ext cx="487885" cy="631042"/>
+          </a:xfrm>
+          <a:prstGeom prst="rect">
+            <a:avLst/>
+          </a:prstGeom>
+        </p:spPr>
+        <p:style>
+          <a:lnRef idx="2">
+            <a:schemeClr val="accent1">
+              <a:shade val="50000"/>
+            </a:schemeClr>
+          </a:lnRef>
+          <a:fillRef idx="1">
+            <a:schemeClr val="accent1"/>
+          </a:fillRef>
+          <a:effectRef idx="0">
+            <a:schemeClr val="accent1"/>
+          </a:effectRef>
+          <a:fontRef idx="minor">
+            <a:schemeClr val="lt1"/>
+          </a:fontRef>
+        </p:style>
+        <p:txBody>
+          <a:bodyPr rtlCol="0" anchor="ctr"/>
+          <a:lstStyle/>
+          <a:p>
+            <a:pPr algn="ctr"/>
+            <a:endParaRPr kumimoji="1" lang="ja-JP" altLang="en-US"/>
+          </a:p>
+        </p:txBody>
+      </p:sp>
+      <p:sp>
+        <p:nvSpPr>
+          <p:cNvPr id="16" name="テキスト ボックス 15">
+            <a:extLst>
+              <a:ext uri="{FF2B5EF4-FFF2-40B4-BE49-F238E27FC236}">
+                <a16:creationId xmlns:a16="http://schemas.microsoft.com/office/drawing/2014/main" id="{3DE3DFD3-A347-45FD-B14B-631E02C069EA}"/>
+              </a:ext>
+            </a:extLst>
+          </p:cNvPr>
+          <p:cNvSpPr txBox="1"/>
+          <p:nvPr/>
+        </p:nvSpPr>
+        <p:spPr>
+          <a:xfrm>
+            <a:off x="9215655" y="2459096"/>
+            <a:ext cx="1561646" cy="338554"/>
+          </a:xfrm>
+          <a:prstGeom prst="rect">
+            <a:avLst/>
+          </a:prstGeom>
+          <a:noFill/>
+        </p:spPr>
+        <p:txBody>
+          <a:bodyPr wrap="none" rtlCol="0">
+            <a:spAutoFit/>
+          </a:bodyPr>
+          <a:lstStyle/>
+          <a:p>
+            <a:r>
+              <a:rPr kumimoji="1" lang="ja-JP" altLang="en-US" sz="1600" b="1" dirty="0">
+                <a:solidFill>
+                  <a:srgbClr val="0070C0"/>
+                </a:solidFill>
+              </a:rPr>
+              <a:t>クライアント</a:t>
+            </a:r>
+            <a:r>
+              <a:rPr kumimoji="1" lang="en-US" altLang="ja-JP" sz="1600" b="1" dirty="0">
+                <a:solidFill>
+                  <a:srgbClr val="0070C0"/>
+                </a:solidFill>
+              </a:rPr>
+              <a:t>B</a:t>
+            </a:r>
+          </a:p>
+        </p:txBody>
+      </p:sp>
+      <p:sp>
+        <p:nvSpPr>
+          <p:cNvPr id="18" name="正方形/長方形 17">
+            <a:extLst>
+              <a:ext uri="{FF2B5EF4-FFF2-40B4-BE49-F238E27FC236}">
+                <a16:creationId xmlns:a16="http://schemas.microsoft.com/office/drawing/2014/main" id="{724CD89E-1865-42A2-B8E4-81111E0C068C}"/>
+              </a:ext>
+            </a:extLst>
+          </p:cNvPr>
+          <p:cNvSpPr/>
+          <p:nvPr/>
+        </p:nvSpPr>
+        <p:spPr>
+          <a:xfrm>
+            <a:off x="9748636" y="4180332"/>
+            <a:ext cx="487885" cy="631042"/>
+          </a:xfrm>
+          <a:prstGeom prst="rect">
+            <a:avLst/>
+          </a:prstGeom>
+        </p:spPr>
+        <p:style>
+          <a:lnRef idx="2">
+            <a:schemeClr val="accent1">
+              <a:shade val="50000"/>
+            </a:schemeClr>
+          </a:lnRef>
+          <a:fillRef idx="1">
+            <a:schemeClr val="accent1"/>
+          </a:fillRef>
+          <a:effectRef idx="0">
+            <a:schemeClr val="accent1"/>
+          </a:effectRef>
+          <a:fontRef idx="minor">
+            <a:schemeClr val="lt1"/>
+          </a:fontRef>
+        </p:style>
+        <p:txBody>
+          <a:bodyPr rtlCol="0" anchor="ctr"/>
+          <a:lstStyle/>
+          <a:p>
+            <a:pPr algn="ctr"/>
+            <a:endParaRPr kumimoji="1" lang="ja-JP" altLang="en-US"/>
+          </a:p>
+        </p:txBody>
+      </p:sp>
+      <p:sp>
+        <p:nvSpPr>
+          <p:cNvPr id="19" name="テキスト ボックス 18">
+            <a:extLst>
+              <a:ext uri="{FF2B5EF4-FFF2-40B4-BE49-F238E27FC236}">
+                <a16:creationId xmlns:a16="http://schemas.microsoft.com/office/drawing/2014/main" id="{B5A4EE89-4B86-4184-9727-6B26B7A91B2C}"/>
+              </a:ext>
+            </a:extLst>
+          </p:cNvPr>
+          <p:cNvSpPr txBox="1"/>
+          <p:nvPr/>
+        </p:nvSpPr>
+        <p:spPr>
+          <a:xfrm>
+            <a:off x="9202368" y="3824528"/>
+            <a:ext cx="1561646" cy="338554"/>
+          </a:xfrm>
+          <a:prstGeom prst="rect">
+            <a:avLst/>
+          </a:prstGeom>
+          <a:noFill/>
+        </p:spPr>
+        <p:txBody>
+          <a:bodyPr wrap="none" rtlCol="0">
+            <a:spAutoFit/>
+          </a:bodyPr>
+          <a:lstStyle/>
+          <a:p>
+            <a:r>
+              <a:rPr kumimoji="1" lang="ja-JP" altLang="en-US" sz="1600" b="1" dirty="0">
+                <a:solidFill>
+                  <a:srgbClr val="0070C0"/>
+                </a:solidFill>
+              </a:rPr>
+              <a:t>クライアント</a:t>
+            </a:r>
+            <a:r>
+              <a:rPr kumimoji="1" lang="en-US" altLang="ja-JP" sz="1600" b="1" dirty="0">
+                <a:solidFill>
+                  <a:srgbClr val="0070C0"/>
+                </a:solidFill>
+              </a:rPr>
+              <a:t>C</a:t>
+            </a:r>
+          </a:p>
+        </p:txBody>
+      </p:sp>
+      <p:sp>
+        <p:nvSpPr>
+          <p:cNvPr id="20" name="正方形/長方形 19">
+            <a:extLst>
+              <a:ext uri="{FF2B5EF4-FFF2-40B4-BE49-F238E27FC236}">
+                <a16:creationId xmlns:a16="http://schemas.microsoft.com/office/drawing/2014/main" id="{753E7D7B-1304-45AC-8A9E-1F092F8E3686}"/>
+              </a:ext>
+            </a:extLst>
+          </p:cNvPr>
+          <p:cNvSpPr/>
+          <p:nvPr/>
+        </p:nvSpPr>
+        <p:spPr>
+          <a:xfrm>
+            <a:off x="9798713" y="5619344"/>
+            <a:ext cx="487885" cy="631042"/>
+          </a:xfrm>
+          <a:prstGeom prst="rect">
+            <a:avLst/>
+          </a:prstGeom>
+        </p:spPr>
+        <p:style>
+          <a:lnRef idx="2">
+            <a:schemeClr val="accent1">
+              <a:shade val="50000"/>
+            </a:schemeClr>
+          </a:lnRef>
+          <a:fillRef idx="1">
+            <a:schemeClr val="accent1"/>
+          </a:fillRef>
+          <a:effectRef idx="0">
+            <a:schemeClr val="accent1"/>
+          </a:effectRef>
+          <a:fontRef idx="minor">
+            <a:schemeClr val="lt1"/>
+          </a:fontRef>
+        </p:style>
+        <p:txBody>
+          <a:bodyPr rtlCol="0" anchor="ctr"/>
+          <a:lstStyle/>
+          <a:p>
+            <a:pPr algn="ctr"/>
+            <a:endParaRPr kumimoji="1" lang="ja-JP" altLang="en-US"/>
+          </a:p>
+        </p:txBody>
+      </p:sp>
+      <p:sp>
+        <p:nvSpPr>
+          <p:cNvPr id="21" name="テキスト ボックス 20">
+            <a:extLst>
+              <a:ext uri="{FF2B5EF4-FFF2-40B4-BE49-F238E27FC236}">
+                <a16:creationId xmlns:a16="http://schemas.microsoft.com/office/drawing/2014/main" id="{E0EC8CE6-8DDB-4D41-BA72-D603110156A7}"/>
+              </a:ext>
+            </a:extLst>
+          </p:cNvPr>
+          <p:cNvSpPr txBox="1"/>
+          <p:nvPr/>
+        </p:nvSpPr>
+        <p:spPr>
+          <a:xfrm>
+            <a:off x="9252445" y="5263540"/>
+            <a:ext cx="1561646" cy="338554"/>
+          </a:xfrm>
+          <a:prstGeom prst="rect">
+            <a:avLst/>
+          </a:prstGeom>
+          <a:noFill/>
+        </p:spPr>
+        <p:txBody>
+          <a:bodyPr wrap="none" rtlCol="0">
+            <a:spAutoFit/>
+          </a:bodyPr>
+          <a:lstStyle/>
+          <a:p>
+            <a:r>
+              <a:rPr kumimoji="1" lang="ja-JP" altLang="en-US" sz="1600" b="1" dirty="0">
+                <a:solidFill>
+                  <a:srgbClr val="0070C0"/>
+                </a:solidFill>
+              </a:rPr>
+              <a:t>クライアント</a:t>
+            </a:r>
+            <a:r>
+              <a:rPr kumimoji="1" lang="en-US" altLang="ja-JP" sz="1600" b="1" dirty="0">
+                <a:solidFill>
+                  <a:srgbClr val="0070C0"/>
+                </a:solidFill>
+              </a:rPr>
+              <a:t>D</a:t>
+            </a:r>
+          </a:p>
+        </p:txBody>
+      </p:sp>
+      <p:sp>
+        <p:nvSpPr>
+          <p:cNvPr id="2" name="矢印: 右 1">
+            <a:extLst>
+              <a:ext uri="{FF2B5EF4-FFF2-40B4-BE49-F238E27FC236}">
+                <a16:creationId xmlns:a16="http://schemas.microsoft.com/office/drawing/2014/main" id="{63F62A76-7ED2-4B86-92B6-CFFFEC66F2F7}"/>
+              </a:ext>
+            </a:extLst>
+          </p:cNvPr>
+          <p:cNvSpPr/>
+          <p:nvPr/>
+        </p:nvSpPr>
+        <p:spPr>
+          <a:xfrm rot="20278838">
+            <a:off x="8328858" y="3277600"/>
+            <a:ext cx="1474899" cy="355804"/>
+          </a:xfrm>
+          <a:prstGeom prst="rightArrow">
+            <a:avLst/>
+          </a:prstGeom>
+          <a:solidFill>
+            <a:schemeClr val="accent6">
+              <a:lumMod val="75000"/>
+            </a:schemeClr>
+          </a:solidFill>
+        </p:spPr>
+        <p:style>
+          <a:lnRef idx="2">
+            <a:schemeClr val="accent6">
+              <a:shade val="50000"/>
+            </a:schemeClr>
+          </a:lnRef>
+          <a:fillRef idx="1">
+            <a:schemeClr val="accent6"/>
+          </a:fillRef>
+          <a:effectRef idx="0">
+            <a:schemeClr val="accent6"/>
+          </a:effectRef>
+          <a:fontRef idx="minor">
+            <a:schemeClr val="lt1"/>
+          </a:fontRef>
+        </p:style>
+        <p:txBody>
+          <a:bodyPr rtlCol="0" anchor="ctr"/>
+          <a:lstStyle/>
+          <a:p>
+            <a:pPr algn="ctr"/>
+            <a:r>
+              <a:rPr kumimoji="1" lang="en-US" altLang="ja-JP" b="1" dirty="0"/>
+              <a:t>ID</a:t>
+            </a:r>
+            <a:endParaRPr kumimoji="1" lang="ja-JP" altLang="en-US" b="1" dirty="0"/>
+          </a:p>
+        </p:txBody>
+      </p:sp>
+      <p:sp>
+        <p:nvSpPr>
+          <p:cNvPr id="22" name="矢印: 右 21">
+            <a:extLst>
+              <a:ext uri="{FF2B5EF4-FFF2-40B4-BE49-F238E27FC236}">
+                <a16:creationId xmlns:a16="http://schemas.microsoft.com/office/drawing/2014/main" id="{0400CC8E-79FC-4286-9EBC-55F3A12F0537}"/>
+              </a:ext>
+            </a:extLst>
+          </p:cNvPr>
+          <p:cNvSpPr/>
+          <p:nvPr/>
+        </p:nvSpPr>
+        <p:spPr>
+          <a:xfrm>
+            <a:off x="8464919" y="4351544"/>
+            <a:ext cx="1283718" cy="355804"/>
+          </a:xfrm>
+          <a:prstGeom prst="rightArrow">
+            <a:avLst/>
+          </a:prstGeom>
+          <a:solidFill>
+            <a:schemeClr val="accent6">
+              <a:lumMod val="75000"/>
+            </a:schemeClr>
+          </a:solidFill>
+        </p:spPr>
+        <p:style>
+          <a:lnRef idx="2">
+            <a:schemeClr val="accent6">
+              <a:shade val="50000"/>
+            </a:schemeClr>
+          </a:lnRef>
+          <a:fillRef idx="1">
+            <a:schemeClr val="accent6"/>
+          </a:fillRef>
+          <a:effectRef idx="0">
+            <a:schemeClr val="accent6"/>
+          </a:effectRef>
+          <a:fontRef idx="minor">
+            <a:schemeClr val="lt1"/>
+          </a:fontRef>
+        </p:style>
+        <p:txBody>
+          <a:bodyPr rtlCol="0" anchor="ctr"/>
+          <a:lstStyle/>
+          <a:p>
+            <a:pPr algn="ctr"/>
+            <a:r>
+              <a:rPr kumimoji="1" lang="en-US" altLang="ja-JP" b="1" dirty="0"/>
+              <a:t>ID</a:t>
+            </a:r>
+            <a:endParaRPr kumimoji="1" lang="ja-JP" altLang="en-US" b="1" dirty="0"/>
+          </a:p>
+        </p:txBody>
+      </p:sp>
+      <p:sp>
+        <p:nvSpPr>
+          <p:cNvPr id="23" name="矢印: 右 22">
+            <a:extLst>
+              <a:ext uri="{FF2B5EF4-FFF2-40B4-BE49-F238E27FC236}">
+                <a16:creationId xmlns:a16="http://schemas.microsoft.com/office/drawing/2014/main" id="{5DD5A8FA-2252-451B-AD48-C7F95B6CE991}"/>
+              </a:ext>
+            </a:extLst>
+          </p:cNvPr>
+          <p:cNvSpPr/>
+          <p:nvPr/>
+        </p:nvSpPr>
+        <p:spPr>
+          <a:xfrm rot="1521312">
+            <a:off x="8417841" y="5350703"/>
+            <a:ext cx="1420873" cy="355804"/>
+          </a:xfrm>
+          <a:prstGeom prst="rightArrow">
+            <a:avLst/>
+          </a:prstGeom>
+          <a:solidFill>
+            <a:schemeClr val="accent6">
+              <a:lumMod val="75000"/>
+            </a:schemeClr>
+          </a:solidFill>
+        </p:spPr>
+        <p:style>
+          <a:lnRef idx="2">
+            <a:schemeClr val="accent6">
+              <a:shade val="50000"/>
+            </a:schemeClr>
+          </a:lnRef>
+          <a:fillRef idx="1">
+            <a:schemeClr val="accent6"/>
+          </a:fillRef>
+          <a:effectRef idx="0">
+            <a:schemeClr val="accent6"/>
+          </a:effectRef>
+          <a:fontRef idx="minor">
+            <a:schemeClr val="lt1"/>
+          </a:fontRef>
+        </p:style>
+        <p:txBody>
+          <a:bodyPr rtlCol="0" anchor="ctr"/>
+          <a:lstStyle/>
+          <a:p>
+            <a:pPr algn="ctr"/>
+            <a:r>
+              <a:rPr kumimoji="1" lang="en-US" altLang="ja-JP" b="1" dirty="0"/>
+              <a:t>ID</a:t>
+            </a:r>
+            <a:endParaRPr kumimoji="1" lang="ja-JP" altLang="en-US" b="1" dirty="0"/>
+          </a:p>
+        </p:txBody>
+      </p:sp>
+      <p:sp>
+        <p:nvSpPr>
+          <p:cNvPr id="24" name="正方形/長方形 23">
+            <a:extLst>
+              <a:ext uri="{FF2B5EF4-FFF2-40B4-BE49-F238E27FC236}">
+                <a16:creationId xmlns:a16="http://schemas.microsoft.com/office/drawing/2014/main" id="{A38D072F-E843-461A-95FE-D34D436F17ED}"/>
+              </a:ext>
+            </a:extLst>
+          </p:cNvPr>
+          <p:cNvSpPr/>
+          <p:nvPr/>
+        </p:nvSpPr>
+        <p:spPr>
+          <a:xfrm>
+            <a:off x="9961522" y="2939078"/>
+            <a:ext cx="1422401" cy="382686"/>
+          </a:xfrm>
+          <a:prstGeom prst="rect">
+            <a:avLst/>
+          </a:prstGeom>
+        </p:spPr>
+        <p:style>
+          <a:lnRef idx="2">
+            <a:schemeClr val="accent2"/>
+          </a:lnRef>
+          <a:fillRef idx="1">
+            <a:schemeClr val="lt1"/>
+          </a:fillRef>
+          <a:effectRef idx="0">
+            <a:schemeClr val="accent2"/>
+          </a:effectRef>
+          <a:fontRef idx="minor">
+            <a:schemeClr val="dk1"/>
+          </a:fontRef>
+        </p:style>
+        <p:txBody>
+          <a:bodyPr rtlCol="0" anchor="ctr"/>
+          <a:lstStyle/>
+          <a:p>
+            <a:pPr algn="ctr"/>
+            <a:r>
+              <a:rPr kumimoji="1" lang="ja-JP" altLang="en-US" sz="900" b="1" dirty="0"/>
+              <a:t>プレイヤー追加</a:t>
+            </a:r>
+            <a:endParaRPr kumimoji="1" lang="en-US" altLang="ja-JP" sz="900" b="1" dirty="0"/>
+          </a:p>
+        </p:txBody>
+      </p:sp>
+      <p:sp>
+        <p:nvSpPr>
+          <p:cNvPr id="25" name="正方形/長方形 24">
+            <a:extLst>
+              <a:ext uri="{FF2B5EF4-FFF2-40B4-BE49-F238E27FC236}">
+                <a16:creationId xmlns:a16="http://schemas.microsoft.com/office/drawing/2014/main" id="{90AE4A2C-BEB4-4EB3-848F-2AB5F77DBFB9}"/>
+              </a:ext>
+            </a:extLst>
+          </p:cNvPr>
+          <p:cNvSpPr/>
+          <p:nvPr/>
+        </p:nvSpPr>
+        <p:spPr>
+          <a:xfrm>
+            <a:off x="9961522" y="4304510"/>
+            <a:ext cx="1422401" cy="382686"/>
+          </a:xfrm>
+          <a:prstGeom prst="rect">
+            <a:avLst/>
+          </a:prstGeom>
+        </p:spPr>
+        <p:style>
+          <a:lnRef idx="2">
+            <a:schemeClr val="accent2"/>
+          </a:lnRef>
+          <a:fillRef idx="1">
+            <a:schemeClr val="lt1"/>
+          </a:fillRef>
+          <a:effectRef idx="0">
+            <a:schemeClr val="accent2"/>
+          </a:effectRef>
+          <a:fontRef idx="minor">
+            <a:schemeClr val="dk1"/>
+          </a:fontRef>
+        </p:style>
+        <p:txBody>
+          <a:bodyPr rtlCol="0" anchor="ctr"/>
+          <a:lstStyle/>
+          <a:p>
+            <a:pPr algn="ctr"/>
+            <a:r>
+              <a:rPr kumimoji="1" lang="ja-JP" altLang="en-US" sz="900" b="1" dirty="0"/>
+              <a:t>プレイヤー追加</a:t>
+            </a:r>
+            <a:endParaRPr kumimoji="1" lang="en-US" altLang="ja-JP" sz="900" b="1" dirty="0"/>
+          </a:p>
+        </p:txBody>
+      </p:sp>
+      <p:sp>
+        <p:nvSpPr>
+          <p:cNvPr id="26" name="正方形/長方形 25">
+            <a:extLst>
+              <a:ext uri="{FF2B5EF4-FFF2-40B4-BE49-F238E27FC236}">
+                <a16:creationId xmlns:a16="http://schemas.microsoft.com/office/drawing/2014/main" id="{7D0F6962-EB6C-4BAA-9C64-62CB0D57EBFA}"/>
+              </a:ext>
+            </a:extLst>
+          </p:cNvPr>
+          <p:cNvSpPr/>
+          <p:nvPr/>
+        </p:nvSpPr>
+        <p:spPr>
+          <a:xfrm>
+            <a:off x="9977056" y="5743522"/>
+            <a:ext cx="1422401" cy="382686"/>
+          </a:xfrm>
+          <a:prstGeom prst="rect">
+            <a:avLst/>
+          </a:prstGeom>
+        </p:spPr>
+        <p:style>
+          <a:lnRef idx="2">
+            <a:schemeClr val="accent2"/>
+          </a:lnRef>
+          <a:fillRef idx="1">
+            <a:schemeClr val="lt1"/>
+          </a:fillRef>
+          <a:effectRef idx="0">
+            <a:schemeClr val="accent2"/>
+          </a:effectRef>
+          <a:fontRef idx="minor">
+            <a:schemeClr val="dk1"/>
+          </a:fontRef>
+        </p:style>
+        <p:txBody>
+          <a:bodyPr rtlCol="0" anchor="ctr"/>
+          <a:lstStyle/>
+          <a:p>
+            <a:pPr algn="ctr"/>
+            <a:r>
+              <a:rPr kumimoji="1" lang="ja-JP" altLang="en-US" sz="900" b="1" dirty="0"/>
+              <a:t>プレイヤー追加</a:t>
+            </a:r>
+            <a:endParaRPr kumimoji="1" lang="en-US" altLang="ja-JP" sz="900" b="1" dirty="0"/>
+          </a:p>
+        </p:txBody>
+      </p:sp>
     </p:spTree>
     <p:extLst>
       <p:ext uri="{BB962C8B-B14F-4D97-AF65-F5344CB8AC3E}">
-        <p14:creationId xmlns:p14="http://schemas.microsoft.com/office/powerpoint/2010/main" val="2760581448"/>
+        <p14:creationId xmlns:p14="http://schemas.microsoft.com/office/powerpoint/2010/main" val="3763398485"/>
       </p:ext>
     </p:extLst>
   </p:cSld>
